--- a/exports/pptx/lessons/senior-module-05-dot-addition/day-04-sutra-apps.pptx
+++ b/exports/pptx/lessons/senior-module-05-dot-addition/day-04-sutra-apps.pptx
@@ -15,9 +15,12 @@
     <p:sldId id="263" r:id="rId9"/>
     <p:sldId id="264" r:id="rId10"/>
     <p:sldId id="265" r:id="rId11"/>
+    <p:sldId id="266" r:id="rId12"/>
+    <p:sldId id="267" r:id="rId13"/>
+    <p:sldId id="268" r:id="rId14"/>
   </p:sldIdLst>
   <p:notesMasterIdLst>
-    <p:notesMasterId r:id="rId12"/>
+    <p:notesMasterId r:id="rId15"/>
   </p:notesMasterIdLst>
   <p:sldSz cx="9144000" cy="5143500"/>
   <p:notesSz cx="5143500" cy="9144000"/>
@@ -623,6 +626,270 @@
             <a:fld id="{F7021451-1387-4CA6-816F-3879F97B5CBC}" type="slidenum">
               <a:rPr lang="en-US"/>
               <a:t>10</a:t>
+            </a:fld>
+            <a:endParaRPr lang="en-US"/>
+          </a:p>
+        </p:txBody>
+      </p:sp>
+    </p:spTree>
+    <p:extLst>
+      <p:ext uri="{BB962C8B-B14F-4D97-AF65-F5344CB8AC3E}">
+        <p14:creationId xmlns:p14="http://schemas.microsoft.com/office/powerpoint/2010/main" val="1024086991"/>
+      </p:ext>
+    </p:extLst>
+  </p:cSld>
+  <p:clrMapOvr>
+    <a:masterClrMapping/>
+  </p:clrMapOvr>
+</p:notes>
+</file>
+
+<file path=ppt/notesSlides/notesSlide11.xml><?xml version="1.0" encoding="utf-8"?>
+<p:notes xmlns:a="http://schemas.openxmlformats.org/drawingml/2006/main" xmlns:r="http://schemas.openxmlformats.org/officeDocument/2006/relationships" xmlns:p="http://schemas.openxmlformats.org/presentationml/2006/main">
+  <p:cSld>
+    <p:spTree>
+      <p:nvGrpSpPr>
+        <p:cNvPr id="1" name=""/>
+        <p:cNvGrpSpPr/>
+        <p:nvPr/>
+      </p:nvGrpSpPr>
+      <p:grpSpPr>
+        <a:xfrm>
+          <a:off x="0" y="0"/>
+          <a:ext cx="0" cy="0"/>
+          <a:chOff x="0" y="0"/>
+          <a:chExt cx="0" cy="0"/>
+        </a:xfrm>
+      </p:grpSpPr>
+      <p:sp>
+        <p:nvSpPr>
+          <p:cNvPr id="2" name="Slide Image Placeholder 1"/>
+          <p:cNvSpPr>
+            <a:spLocks noGrp="1" noRot="1" noChangeAspect="1"/>
+          </p:cNvSpPr>
+          <p:nvPr>
+            <p:ph type="sldImg"/>
+          </p:nvPr>
+        </p:nvSpPr>
+        <p:spPr/>
+      </p:sp>
+      <p:sp>
+        <p:nvSpPr>
+          <p:cNvPr id="3" name="Notes Placeholder 2"/>
+          <p:cNvSpPr>
+            <a:spLocks noGrp="1"/>
+          </p:cNvSpPr>
+          <p:nvPr>
+            <p:ph type="body" idx="1"/>
+          </p:nvPr>
+        </p:nvSpPr>
+        <p:spPr/>
+        <p:txBody>
+          <a:bodyPr/>
+          <a:lstStyle/>
+          <a:p>
+            <a:r>
+              <a:rPr lang="en-US" dirty="0"/>
+              <a:t/>
+            </a:r>
+            <a:endParaRPr lang="en-US" dirty="0"/>
+          </a:p>
+        </p:txBody>
+      </p:sp>
+      <p:sp>
+        <p:nvSpPr>
+          <p:cNvPr id="4" name="Slide Number Placeholder 3"/>
+          <p:cNvSpPr>
+            <a:spLocks noGrp="1"/>
+          </p:cNvSpPr>
+          <p:nvPr>
+            <p:ph type="sldNum" sz="quarter" idx="10"/>
+          </p:nvPr>
+        </p:nvSpPr>
+        <p:spPr/>
+        <p:txBody>
+          <a:bodyPr/>
+          <a:lstStyle/>
+          <a:p>
+            <a:fld id="{F7021451-1387-4CA6-816F-3879F97B5CBC}" type="slidenum">
+              <a:rPr lang="en-US"/>
+              <a:t>11</a:t>
+            </a:fld>
+            <a:endParaRPr lang="en-US"/>
+          </a:p>
+        </p:txBody>
+      </p:sp>
+    </p:spTree>
+    <p:extLst>
+      <p:ext uri="{BB962C8B-B14F-4D97-AF65-F5344CB8AC3E}">
+        <p14:creationId xmlns:p14="http://schemas.microsoft.com/office/powerpoint/2010/main" val="1024086991"/>
+      </p:ext>
+    </p:extLst>
+  </p:cSld>
+  <p:clrMapOvr>
+    <a:masterClrMapping/>
+  </p:clrMapOvr>
+</p:notes>
+</file>
+
+<file path=ppt/notesSlides/notesSlide12.xml><?xml version="1.0" encoding="utf-8"?>
+<p:notes xmlns:a="http://schemas.openxmlformats.org/drawingml/2006/main" xmlns:r="http://schemas.openxmlformats.org/officeDocument/2006/relationships" xmlns:p="http://schemas.openxmlformats.org/presentationml/2006/main">
+  <p:cSld>
+    <p:spTree>
+      <p:nvGrpSpPr>
+        <p:cNvPr id="1" name=""/>
+        <p:cNvGrpSpPr/>
+        <p:nvPr/>
+      </p:nvGrpSpPr>
+      <p:grpSpPr>
+        <a:xfrm>
+          <a:off x="0" y="0"/>
+          <a:ext cx="0" cy="0"/>
+          <a:chOff x="0" y="0"/>
+          <a:chExt cx="0" cy="0"/>
+        </a:xfrm>
+      </p:grpSpPr>
+      <p:sp>
+        <p:nvSpPr>
+          <p:cNvPr id="2" name="Slide Image Placeholder 1"/>
+          <p:cNvSpPr>
+            <a:spLocks noGrp="1" noRot="1" noChangeAspect="1"/>
+          </p:cNvSpPr>
+          <p:nvPr>
+            <p:ph type="sldImg"/>
+          </p:nvPr>
+        </p:nvSpPr>
+        <p:spPr/>
+      </p:sp>
+      <p:sp>
+        <p:nvSpPr>
+          <p:cNvPr id="3" name="Notes Placeholder 2"/>
+          <p:cNvSpPr>
+            <a:spLocks noGrp="1"/>
+          </p:cNvSpPr>
+          <p:nvPr>
+            <p:ph type="body" idx="1"/>
+          </p:nvPr>
+        </p:nvSpPr>
+        <p:spPr/>
+        <p:txBody>
+          <a:bodyPr/>
+          <a:lstStyle/>
+          <a:p>
+            <a:r>
+              <a:rPr lang="en-US" dirty="0"/>
+              <a:t/>
+            </a:r>
+            <a:endParaRPr lang="en-US" dirty="0"/>
+          </a:p>
+        </p:txBody>
+      </p:sp>
+      <p:sp>
+        <p:nvSpPr>
+          <p:cNvPr id="4" name="Slide Number Placeholder 3"/>
+          <p:cNvSpPr>
+            <a:spLocks noGrp="1"/>
+          </p:cNvSpPr>
+          <p:nvPr>
+            <p:ph type="sldNum" sz="quarter" idx="10"/>
+          </p:nvPr>
+        </p:nvSpPr>
+        <p:spPr/>
+        <p:txBody>
+          <a:bodyPr/>
+          <a:lstStyle/>
+          <a:p>
+            <a:fld id="{F7021451-1387-4CA6-816F-3879F97B5CBC}" type="slidenum">
+              <a:rPr lang="en-US"/>
+              <a:t>12</a:t>
+            </a:fld>
+            <a:endParaRPr lang="en-US"/>
+          </a:p>
+        </p:txBody>
+      </p:sp>
+    </p:spTree>
+    <p:extLst>
+      <p:ext uri="{BB962C8B-B14F-4D97-AF65-F5344CB8AC3E}">
+        <p14:creationId xmlns:p14="http://schemas.microsoft.com/office/powerpoint/2010/main" val="1024086991"/>
+      </p:ext>
+    </p:extLst>
+  </p:cSld>
+  <p:clrMapOvr>
+    <a:masterClrMapping/>
+  </p:clrMapOvr>
+</p:notes>
+</file>
+
+<file path=ppt/notesSlides/notesSlide13.xml><?xml version="1.0" encoding="utf-8"?>
+<p:notes xmlns:a="http://schemas.openxmlformats.org/drawingml/2006/main" xmlns:r="http://schemas.openxmlformats.org/officeDocument/2006/relationships" xmlns:p="http://schemas.openxmlformats.org/presentationml/2006/main">
+  <p:cSld>
+    <p:spTree>
+      <p:nvGrpSpPr>
+        <p:cNvPr id="1" name=""/>
+        <p:cNvGrpSpPr/>
+        <p:nvPr/>
+      </p:nvGrpSpPr>
+      <p:grpSpPr>
+        <a:xfrm>
+          <a:off x="0" y="0"/>
+          <a:ext cx="0" cy="0"/>
+          <a:chOff x="0" y="0"/>
+          <a:chExt cx="0" cy="0"/>
+        </a:xfrm>
+      </p:grpSpPr>
+      <p:sp>
+        <p:nvSpPr>
+          <p:cNvPr id="2" name="Slide Image Placeholder 1"/>
+          <p:cNvSpPr>
+            <a:spLocks noGrp="1" noRot="1" noChangeAspect="1"/>
+          </p:cNvSpPr>
+          <p:nvPr>
+            <p:ph type="sldImg"/>
+          </p:nvPr>
+        </p:nvSpPr>
+        <p:spPr/>
+      </p:sp>
+      <p:sp>
+        <p:nvSpPr>
+          <p:cNvPr id="3" name="Notes Placeholder 2"/>
+          <p:cNvSpPr>
+            <a:spLocks noGrp="1"/>
+          </p:cNvSpPr>
+          <p:nvPr>
+            <p:ph type="body" idx="1"/>
+          </p:nvPr>
+        </p:nvSpPr>
+        <p:spPr/>
+        <p:txBody>
+          <a:bodyPr/>
+          <a:lstStyle/>
+          <a:p>
+            <a:r>
+              <a:rPr lang="en-US" dirty="0"/>
+              <a:t/>
+            </a:r>
+            <a:endParaRPr lang="en-US" dirty="0"/>
+          </a:p>
+        </p:txBody>
+      </p:sp>
+      <p:sp>
+        <p:nvSpPr>
+          <p:cNvPr id="4" name="Slide Number Placeholder 3"/>
+          <p:cNvSpPr>
+            <a:spLocks noGrp="1"/>
+          </p:cNvSpPr>
+          <p:nvPr>
+            <p:ph type="sldNum" sz="quarter" idx="10"/>
+          </p:nvPr>
+        </p:nvSpPr>
+        <p:spPr/>
+        <p:txBody>
+          <a:bodyPr/>
+          <a:lstStyle/>
+          <a:p>
+            <a:fld id="{F7021451-1387-4CA6-816F-3879F97B5CBC}" type="slidenum">
+              <a:rPr lang="en-US"/>
+              <a:t>13</a:t>
             </a:fld>
             <a:endParaRPr lang="en-US"/>
           </a:p>
@@ -1876,194 +2143,6 @@
         </p:nvSpPr>
         <p:spPr>
           <a:xfrm>
-            <a:off x="406301" y="1223963"/>
-            <a:ext cx="8498026" cy="274290"/>
-          </a:xfrm>
-          <a:prstGeom prst="rect">
-            <a:avLst/>
-          </a:prstGeom>
-          <a:noFill/>
-          <a:ln/>
-        </p:spPr>
-        <p:txBody>
-          <a:bodyPr wrap="square" lIns="0" tIns="0" rIns="0" bIns="0" rtlCol="0" anchor="t"/>
-          <a:lstStyle/>
-          <a:p>
-            <a:pPr algn="l" indent="0" marL="0">
-              <a:lnSpc>
-                <a:spcPts val="2160"/>
-              </a:lnSpc>
-              <a:spcBef>
-                <a:spcPts val="600"/>
-              </a:spcBef>
-              <a:spcAft>
-                <a:spcPts val="800"/>
-              </a:spcAft>
-              <a:buNone/>
-            </a:pPr>
-            <a:r>
-              <a:rPr lang="en-US" sz="1800" b="1" dirty="0">
-                <a:solidFill>
-                  <a:srgbClr val="997929"/>
-                </a:solidFill>
-                <a:latin typeface="Times New Roman" pitchFamily="34" charset="0"/>
-                <a:ea typeface="Times New Roman" pitchFamily="34" charset="-122"/>
-                <a:cs typeface="Times New Roman" pitchFamily="34" charset="-120"/>
-              </a:rPr>
-              <a:t>Learning objective</a:t>
-            </a:r>
-            <a:endParaRPr lang="en-US" sz="1800" dirty="0"/>
-          </a:p>
-        </p:txBody>
-      </p:sp>
-      <p:sp>
-        <p:nvSpPr>
-          <p:cNvPr id="6" name="Text 4"/>
-          <p:cNvSpPr/>
-          <p:nvPr/>
-        </p:nvSpPr>
-        <p:spPr>
-          <a:xfrm>
-            <a:off x="406301" y="1637854"/>
-            <a:ext cx="8498026" cy="426541"/>
-          </a:xfrm>
-          <a:prstGeom prst="rect">
-            <a:avLst/>
-          </a:prstGeom>
-          <a:noFill/>
-          <a:ln/>
-        </p:spPr>
-        <p:txBody>
-          <a:bodyPr wrap="square" lIns="0" tIns="0" rIns="0" bIns="0" rtlCol="0" anchor="t"/>
-          <a:lstStyle/>
-          <a:p>
-            <a:pPr algn="l" indent="0" marL="0">
-              <a:lnSpc>
-                <a:spcPts val="1680"/>
-              </a:lnSpc>
-              <a:spcBef>
-                <a:spcPts val="300"/>
-              </a:spcBef>
-              <a:spcAft>
-                <a:spcPts val="300"/>
-              </a:spcAft>
-              <a:buNone/>
-            </a:pPr>
-            <a:r>
-              <a:rPr lang="en-US" sz="1200" dirty="0">
-                <a:solidFill>
-                  <a:srgbClr val="1A1A1A"/>
-                </a:solidFill>
-                <a:latin typeface="Georgia" pitchFamily="34" charset="0"/>
-                <a:ea typeface="Georgia" pitchFamily="34" charset="-122"/>
-                <a:cs typeface="Georgia" pitchFamily="34" charset="-120"/>
-              </a:rPr>
-              <a:t>Students apply </a:t>
-            </a:r>
-            <a:pPr algn="l" indent="0" marL="0">
-              <a:lnSpc>
-                <a:spcPts val="1680"/>
-              </a:lnSpc>
-              <a:spcBef>
-                <a:spcPts val="300"/>
-              </a:spcBef>
-              <a:spcAft>
-                <a:spcPts val="300"/>
-              </a:spcAft>
-              <a:buNone/>
-            </a:pPr>
-            <a:r>
-              <a:rPr lang="en-US" sz="1200" i="1" dirty="0">
-                <a:solidFill>
-                  <a:srgbClr val="1A1A1A"/>
-                </a:solidFill>
-                <a:latin typeface="Georgia" pitchFamily="34" charset="0"/>
-                <a:ea typeface="Georgia" pitchFamily="34" charset="-122"/>
-                <a:cs typeface="Georgia" pitchFamily="34" charset="-120"/>
-              </a:rPr>
-              <a:t>Sankalana Vyavakalanābhyām</a:t>
-            </a:r>
-            <a:pPr algn="l" indent="0" marL="0">
-              <a:lnSpc>
-                <a:spcPts val="1680"/>
-              </a:lnSpc>
-              <a:spcBef>
-                <a:spcPts val="300"/>
-              </a:spcBef>
-              <a:spcAft>
-                <a:spcPts val="300"/>
-              </a:spcAft>
-              <a:buNone/>
-            </a:pPr>
-            <a:r>
-              <a:rPr lang="en-US" sz="1200" dirty="0">
-                <a:solidFill>
-                  <a:srgbClr val="1A1A1A"/>
-                </a:solidFill>
-                <a:latin typeface="Georgia" pitchFamily="34" charset="0"/>
-                <a:ea typeface="Georgia" pitchFamily="34" charset="-122"/>
-                <a:cs typeface="Georgia" pitchFamily="34" charset="-120"/>
-              </a:rPr>
-              <a:t> and </a:t>
-            </a:r>
-            <a:pPr algn="l" indent="0" marL="0">
-              <a:lnSpc>
-                <a:spcPts val="1680"/>
-              </a:lnSpc>
-              <a:spcBef>
-                <a:spcPts val="300"/>
-              </a:spcBef>
-              <a:spcAft>
-                <a:spcPts val="300"/>
-              </a:spcAft>
-              <a:buNone/>
-            </a:pPr>
-            <a:r>
-              <a:rPr lang="en-US" sz="1200" i="1" dirty="0">
-                <a:solidFill>
-                  <a:srgbClr val="1A1A1A"/>
-                </a:solidFill>
-                <a:latin typeface="Georgia" pitchFamily="34" charset="0"/>
-                <a:ea typeface="Georgia" pitchFamily="34" charset="-122"/>
-                <a:cs typeface="Georgia" pitchFamily="34" charset="-120"/>
-              </a:rPr>
-              <a:t>Pūraṇāpūraṇābhyāṁ</a:t>
-            </a:r>
-            <a:pPr algn="l" indent="0" marL="0">
-              <a:lnSpc>
-                <a:spcPts val="1680"/>
-              </a:lnSpc>
-              <a:spcBef>
-                <a:spcPts val="300"/>
-              </a:spcBef>
-              <a:spcAft>
-                <a:spcPts val="300"/>
-              </a:spcAft>
-              <a:buNone/>
-            </a:pPr>
-            <a:r>
-              <a:rPr lang="en-US" sz="1200" dirty="0">
-                <a:solidFill>
-                  <a:srgbClr val="1A1A1A"/>
-                </a:solidFill>
-                <a:latin typeface="Georgia" pitchFamily="34" charset="0"/>
-                <a:ea typeface="Georgia" pitchFamily="34" charset="-122"/>
-                <a:cs typeface="Georgia" pitchFamily="34" charset="-120"/>
-              </a:rPr>
-              <a:t> to a range of mental-arithmetic problems beyond simple addition.</a:t>
-            </a:r>
-            <a:endParaRPr lang="en-US" sz="1200" dirty="0"/>
-          </a:p>
-        </p:txBody>
-      </p:sp>
-      <p:sp>
-        <p:nvSpPr>
-          <p:cNvPr id="7" name="Text 5"/>
-          <p:cNvSpPr/>
-          <p:nvPr/>
-        </p:nvSpPr>
-        <p:spPr>
-          <a:xfrm>
             <a:off x="406301" y="4434929"/>
             <a:ext cx="8498026" cy="213271"/>
           </a:xfrm>
@@ -2208,7 +2287,7 @@
                 <a:ea typeface="Times New Roman" pitchFamily="34" charset="-122"/>
                 <a:cs typeface="Times New Roman" pitchFamily="34" charset="-120"/>
               </a:rPr>
-              <a:t>Citation(s) used</a:t>
+              <a:t>Wrap-up (5 min)</a:t>
             </a:r>
             <a:endParaRPr lang="en-US" sz="1800" dirty="0"/>
           </a:p>
@@ -2246,6 +2325,26 @@
               <a:buChar char="•"/>
             </a:pPr>
             <a:r>
+              <a:rPr lang="en-US" sz="1200" dirty="0">
+                <a:solidFill>
+                  <a:srgbClr val="1A1A1A"/>
+                </a:solidFill>
+                <a:latin typeface="Georgia" pitchFamily="34" charset="0"/>
+                <a:ea typeface="Georgia" pitchFamily="34" charset="-122"/>
+                <a:cs typeface="Georgia" pitchFamily="34" charset="-120"/>
+              </a:rPr>
+              <a:t>Preview Day 5: </a:t>
+            </a:r>
+            <a:pPr algn="l" indent="0" marL="0">
+              <a:lnSpc>
+                <a:spcPts val="1620"/>
+              </a:lnSpc>
+              <a:spcAft>
+                <a:spcPts val="300"/>
+              </a:spcAft>
+              <a:buNone/>
+            </a:pPr>
+            <a:r>
               <a:rPr lang="en-US" sz="1200" i="1" dirty="0">
                 <a:solidFill>
                   <a:srgbClr val="1A1A1A"/>
@@ -2254,27 +2353,7 @@
                 <a:ea typeface="Georgia" pitchFamily="34" charset="-122"/>
                 <a:cs typeface="Georgia" pitchFamily="34" charset="-120"/>
               </a:rPr>
-              <a:t>Vedic Mathematics Batch1.pdf</a:t>
-            </a:r>
-            <a:pPr algn="l" indent="0" marL="0">
-              <a:lnSpc>
-                <a:spcPts val="1620"/>
-              </a:lnSpc>
-              <a:spcAft>
-                <a:spcPts val="300"/>
-              </a:spcAft>
-              <a:buNone/>
-            </a:pPr>
-            <a:r>
-              <a:rPr lang="en-US" sz="1200" dirty="0">
-                <a:solidFill>
-                  <a:srgbClr val="1A1A1A"/>
-                </a:solidFill>
-                <a:latin typeface="Georgia" pitchFamily="34" charset="0"/>
-                <a:ea typeface="Georgia" pitchFamily="34" charset="-122"/>
-                <a:cs typeface="Georgia" pitchFamily="34" charset="-120"/>
-              </a:rPr>
-              <a:t>, §5.5 (Sankalana applications).</a:t>
+              <a:t>"Tomorrow — does the dot method work in other bases? Let's find out."</a:t>
             </a:r>
             <a:endParaRPr lang="en-US" sz="1200" dirty="0"/>
           </a:p>
@@ -2288,7 +2367,7 @@
         </p:nvSpPr>
         <p:spPr>
           <a:xfrm>
-            <a:off x="406301" y="1254323"/>
+            <a:off x="406301" y="4434929"/>
             <a:ext cx="8498026" cy="213271"/>
           </a:xfrm>
           <a:prstGeom prst="rect">
@@ -2322,15 +2401,767 @@
                 <a:ea typeface="Georgia" pitchFamily="34" charset="-122"/>
                 <a:cs typeface="Georgia" pitchFamily="34" charset="-120"/>
               </a:rPr>
-              <a:t>– Tirthaji (1965), Chapter on Pūraṇāpūraṇābhyām.</a:t>
+              <a:t>Senior ·  · IKS Curriculum</a:t>
             </a:r>
             <a:endParaRPr lang="en-US" sz="1200" dirty="0"/>
           </a:p>
         </p:txBody>
       </p:sp>
-      <p:sp>
-        <p:nvSpPr>
-          <p:cNvPr id="6" name="Text 4"/>
+    </p:spTree>
+  </p:cSld>
+  <p:clrMapOvr>
+    <a:masterClrMapping/>
+  </p:clrMapOvr>
+</p:sld>
+</file>
+
+<file path=ppt/slides/slide11.xml><?xml version="1.0" encoding="utf-8"?>
+<p:sld xmlns:a="http://schemas.openxmlformats.org/drawingml/2006/main" xmlns:r="http://schemas.openxmlformats.org/officeDocument/2006/relationships" xmlns:p="http://schemas.openxmlformats.org/presentationml/2006/main">
+  <p:cSld name="Slide 11">
+    <p:bg>
+      <p:bgPr>
+        <a:solidFill>
+          <a:srgbClr val="FAF7F2"/>
+        </a:solidFill>
+      </p:bgPr>
+    </p:bg>
+    <p:spTree>
+      <p:nvGrpSpPr>
+        <p:cNvPr id="1" name=""/>
+        <p:cNvGrpSpPr/>
+        <p:nvPr/>
+      </p:nvGrpSpPr>
+      <p:grpSpPr>
+        <a:xfrm>
+          <a:off x="0" y="0"/>
+          <a:ext cx="0" cy="0"/>
+          <a:chOff x="0" y="0"/>
+          <a:chExt cx="0" cy="0"/>
+        </a:xfrm>
+      </p:grpSpPr>
+      <p:sp>
+        <p:nvSpPr>
+          <p:cNvPr id="2" name="Text 0"/>
+          <p:cNvSpPr/>
+          <p:nvPr/>
+        </p:nvSpPr>
+        <p:spPr>
+          <a:xfrm>
+            <a:off x="0" y="0"/>
+            <a:ext cx="9144000" cy="101501"/>
+          </a:xfrm>
+          <a:prstGeom prst="rect">
+            <a:avLst/>
+          </a:prstGeom>
+          <a:solidFill>
+            <a:srgbClr val="5D1D2E"/>
+          </a:solidFill>
+          <a:ln/>
+        </p:spPr>
+        <p:txBody>
+          <a:bodyPr wrap="square" rtlCol="0" anchor="ctr"/>
+          <a:lstStyle/>
+          <a:p>
+            <a:pPr indent="0" marL="0">
+              <a:buNone/>
+            </a:pPr>
+            <a:endParaRPr lang="en-US" dirty="0"/>
+          </a:p>
+        </p:txBody>
+      </p:sp>
+      <p:sp>
+        <p:nvSpPr>
+          <p:cNvPr id="3" name="Text 1"/>
+          <p:cNvSpPr/>
+          <p:nvPr/>
+        </p:nvSpPr>
+        <p:spPr>
+          <a:xfrm>
+            <a:off x="406301" y="457051"/>
+            <a:ext cx="8498026" cy="274290"/>
+          </a:xfrm>
+          <a:prstGeom prst="rect">
+            <a:avLst/>
+          </a:prstGeom>
+          <a:noFill/>
+          <a:ln/>
+        </p:spPr>
+        <p:txBody>
+          <a:bodyPr wrap="square" lIns="0" tIns="0" rIns="0" bIns="0" rtlCol="0" anchor="t"/>
+          <a:lstStyle/>
+          <a:p>
+            <a:pPr algn="l" indent="0" marL="0">
+              <a:lnSpc>
+                <a:spcPts val="2160"/>
+              </a:lnSpc>
+              <a:spcBef>
+                <a:spcPts val="600"/>
+              </a:spcBef>
+              <a:spcAft>
+                <a:spcPts val="800"/>
+              </a:spcAft>
+              <a:buNone/>
+            </a:pPr>
+            <a:r>
+              <a:rPr lang="en-US" sz="1800" b="1" dirty="0">
+                <a:solidFill>
+                  <a:srgbClr val="997929"/>
+                </a:solidFill>
+                <a:latin typeface="Times New Roman" pitchFamily="34" charset="0"/>
+                <a:ea typeface="Times New Roman" pitchFamily="34" charset="-122"/>
+                <a:cs typeface="Times New Roman" pitchFamily="34" charset="-120"/>
+              </a:rPr>
+              <a:t>Differentiation</a:t>
+            </a:r>
+            <a:endParaRPr lang="en-US" sz="1800" dirty="0"/>
+          </a:p>
+        </p:txBody>
+      </p:sp>
+      <p:sp>
+        <p:nvSpPr>
+          <p:cNvPr id="4" name="Text 2"/>
+          <p:cNvSpPr/>
+          <p:nvPr/>
+        </p:nvSpPr>
+        <p:spPr>
+          <a:xfrm>
+            <a:off x="634901" y="883593"/>
+            <a:ext cx="8102798" cy="769441"/>
+          </a:xfrm>
+          <a:prstGeom prst="rect">
+            <a:avLst/>
+          </a:prstGeom>
+          <a:noFill/>
+          <a:ln/>
+        </p:spPr>
+        <p:txBody>
+          <a:bodyPr wrap="square" lIns="0" tIns="0" rIns="0" bIns="0" rtlCol="0" anchor="t"/>
+          <a:lstStyle/>
+          <a:p>
+            <a:pPr algn="l" marL="342900" indent="-342900">
+              <a:lnSpc>
+                <a:spcPts val="1620"/>
+              </a:lnSpc>
+              <a:spcAft>
+                <a:spcPts val="300"/>
+              </a:spcAft>
+              <a:buSzPct val="100000"/>
+              <a:buChar char="•"/>
+            </a:pPr>
+            <a:r>
+              <a:rPr lang="en-US" sz="1200" b="1" dirty="0">
+                <a:solidFill>
+                  <a:srgbClr val="1A1A1A"/>
+                </a:solidFill>
+                <a:latin typeface="Georgia" pitchFamily="34" charset="0"/>
+                <a:ea typeface="Georgia" pitchFamily="34" charset="-122"/>
+                <a:cs typeface="Georgia" pitchFamily="34" charset="-120"/>
+              </a:rPr>
+              <a:t>Tier up:</a:t>
+            </a:r>
+            <a:pPr algn="l" indent="0" marL="0">
+              <a:lnSpc>
+                <a:spcPts val="1620"/>
+              </a:lnSpc>
+              <a:spcAft>
+                <a:spcPts val="300"/>
+              </a:spcAft>
+              <a:buNone/>
+            </a:pPr>
+            <a:r>
+              <a:rPr lang="en-US" sz="1200" dirty="0">
+                <a:solidFill>
+                  <a:srgbClr val="1A1A1A"/>
+                </a:solidFill>
+                <a:latin typeface="Georgia" pitchFamily="34" charset="0"/>
+                <a:ea typeface="Georgia" pitchFamily="34" charset="-122"/>
+                <a:cs typeface="Georgia" pitchFamily="34" charset="-120"/>
+              </a:rPr>
+              <a:t> Pick </a:t>
+            </a:r>
+            <a:pPr algn="l" indent="0" marL="0">
+              <a:lnSpc>
+                <a:spcPts val="1620"/>
+              </a:lnSpc>
+              <a:spcAft>
+                <a:spcPts val="300"/>
+              </a:spcAft>
+              <a:buNone/>
+            </a:pPr>
+            <a:r>
+              <a:rPr lang="en-US" sz="1200" i="1" dirty="0">
+                <a:solidFill>
+                  <a:srgbClr val="1A1A1A"/>
+                </a:solidFill>
+                <a:latin typeface="Georgia" pitchFamily="34" charset="0"/>
+                <a:ea typeface="Georgia" pitchFamily="34" charset="-122"/>
+                <a:cs typeface="Georgia" pitchFamily="34" charset="-120"/>
+              </a:rPr>
+              <a:t>Ūrdhva-Tiryagbhyām</a:t>
+            </a:r>
+            <a:pPr algn="l" indent="0" marL="0">
+              <a:lnSpc>
+                <a:spcPts val="1620"/>
+              </a:lnSpc>
+              <a:spcAft>
+                <a:spcPts val="300"/>
+              </a:spcAft>
+              <a:buNone/>
+            </a:pPr>
+            <a:r>
+              <a:rPr lang="en-US" sz="1200" dirty="0">
+                <a:solidFill>
+                  <a:srgbClr val="1A1A1A"/>
+                </a:solidFill>
+                <a:latin typeface="Georgia" pitchFamily="34" charset="0"/>
+                <a:ea typeface="Georgia" pitchFamily="34" charset="-122"/>
+                <a:cs typeface="Georgia" pitchFamily="34" charset="-120"/>
+              </a:rPr>
+              <a:t> (vertically-and-crosswise multiplication). Self-teach from </a:t>
+            </a:r>
+            <a:pPr algn="l" indent="0" marL="0">
+              <a:lnSpc>
+                <a:spcPts val="1620"/>
+              </a:lnSpc>
+              <a:spcAft>
+                <a:spcPts val="300"/>
+              </a:spcAft>
+              <a:buNone/>
+            </a:pPr>
+            <a:r>
+              <a:rPr lang="en-US" sz="1200" dirty="0">
+                <a:solidFill>
+                  <a:srgbClr val="1A1A1A"/>
+                </a:solidFill>
+                <a:latin typeface="Georgia" pitchFamily="34" charset="0"/>
+                <a:ea typeface="Georgia" pitchFamily="34" charset="-122"/>
+                <a:cs typeface="Georgia" pitchFamily="34" charset="-120"/>
+              </a:rPr>
+              <a:t>Vedic Mathematics.pdf</a:t>
+            </a:r>
+            <a:pPr algn="l" indent="0" marL="0">
+              <a:lnSpc>
+                <a:spcPts val="1620"/>
+              </a:lnSpc>
+              <a:spcAft>
+                <a:spcPts val="300"/>
+              </a:spcAft>
+              <a:buNone/>
+            </a:pPr>
+            <a:r>
+              <a:rPr lang="en-US" sz="1200" dirty="0">
+                <a:solidFill>
+                  <a:srgbClr val="1A1A1A"/>
+                </a:solidFill>
+                <a:latin typeface="Georgia" pitchFamily="34" charset="0"/>
+                <a:ea typeface="Georgia" pitchFamily="34" charset="-122"/>
+                <a:cs typeface="Georgia" pitchFamily="34" charset="-120"/>
+              </a:rPr>
+              <a:t> §3.</a:t>
+            </a:r>
+            <a:endParaRPr lang="en-US" sz="1200" dirty="0"/>
+          </a:p>
+          <a:p>
+            <a:pPr algn="l" marL="342900" indent="-342900">
+              <a:lnSpc>
+                <a:spcPts val="1620"/>
+              </a:lnSpc>
+              <a:spcAft>
+                <a:spcPts val="300"/>
+              </a:spcAft>
+              <a:buSzPct val="100000"/>
+              <a:buChar char="•"/>
+            </a:pPr>
+            <a:r>
+              <a:rPr lang="en-US" sz="1200" b="1" dirty="0">
+                <a:solidFill>
+                  <a:srgbClr val="1A1A1A"/>
+                </a:solidFill>
+                <a:latin typeface="Georgia" pitchFamily="34" charset="0"/>
+                <a:ea typeface="Georgia" pitchFamily="34" charset="-122"/>
+                <a:cs typeface="Georgia" pitchFamily="34" charset="-120"/>
+              </a:rPr>
+              <a:t>Tier down:</a:t>
+            </a:r>
+            <a:pPr algn="l" indent="0" marL="0">
+              <a:lnSpc>
+                <a:spcPts val="1620"/>
+              </a:lnSpc>
+              <a:spcAft>
+                <a:spcPts val="300"/>
+              </a:spcAft>
+              <a:buNone/>
+            </a:pPr>
+            <a:r>
+              <a:rPr lang="en-US" sz="1200" dirty="0">
+                <a:solidFill>
+                  <a:srgbClr val="1A1A1A"/>
+                </a:solidFill>
+                <a:latin typeface="Georgia" pitchFamily="34" charset="0"/>
+                <a:ea typeface="Georgia" pitchFamily="34" charset="-122"/>
+                <a:cs typeface="Georgia" pitchFamily="34" charset="-120"/>
+              </a:rPr>
+              <a:t> Focus on Sankalana additions only.</a:t>
+            </a:r>
+            <a:endParaRPr lang="en-US" sz="1200" dirty="0"/>
+          </a:p>
+        </p:txBody>
+      </p:sp>
+      <p:sp>
+        <p:nvSpPr>
+          <p:cNvPr id="5" name="Text 3"/>
+          <p:cNvSpPr/>
+          <p:nvPr/>
+        </p:nvSpPr>
+        <p:spPr>
+          <a:xfrm>
+            <a:off x="406301" y="4434929"/>
+            <a:ext cx="8498026" cy="213271"/>
+          </a:xfrm>
+          <a:prstGeom prst="rect">
+            <a:avLst/>
+          </a:prstGeom>
+          <a:noFill/>
+          <a:ln/>
+        </p:spPr>
+        <p:txBody>
+          <a:bodyPr wrap="square" lIns="0" tIns="0" rIns="0" bIns="0" rtlCol="0" anchor="t"/>
+          <a:lstStyle/>
+          <a:p>
+            <a:pPr algn="l" indent="0" marL="0">
+              <a:lnSpc>
+                <a:spcPts val="1680"/>
+              </a:lnSpc>
+              <a:spcBef>
+                <a:spcPts val="300"/>
+              </a:spcBef>
+              <a:spcAft>
+                <a:spcPts val="300"/>
+              </a:spcAft>
+              <a:buNone/>
+            </a:pPr>
+            <a:r>
+              <a:rPr lang="en-US" sz="1200" dirty="0">
+                <a:solidFill>
+                  <a:srgbClr val="1A1A1A"/>
+                </a:solidFill>
+                <a:latin typeface="Georgia" pitchFamily="34" charset="0"/>
+                <a:ea typeface="Georgia" pitchFamily="34" charset="-122"/>
+                <a:cs typeface="Georgia" pitchFamily="34" charset="-120"/>
+              </a:rPr>
+              <a:t>Senior ·  · IKS Curriculum</a:t>
+            </a:r>
+            <a:endParaRPr lang="en-US" sz="1200" dirty="0"/>
+          </a:p>
+        </p:txBody>
+      </p:sp>
+    </p:spTree>
+  </p:cSld>
+  <p:clrMapOvr>
+    <a:masterClrMapping/>
+  </p:clrMapOvr>
+</p:sld>
+</file>
+
+<file path=ppt/slides/slide12.xml><?xml version="1.0" encoding="utf-8"?>
+<p:sld xmlns:a="http://schemas.openxmlformats.org/drawingml/2006/main" xmlns:r="http://schemas.openxmlformats.org/officeDocument/2006/relationships" xmlns:p="http://schemas.openxmlformats.org/presentationml/2006/main">
+  <p:cSld name="Slide 12">
+    <p:bg>
+      <p:bgPr>
+        <a:solidFill>
+          <a:srgbClr val="FAF7F2"/>
+        </a:solidFill>
+      </p:bgPr>
+    </p:bg>
+    <p:spTree>
+      <p:nvGrpSpPr>
+        <p:cNvPr id="1" name=""/>
+        <p:cNvGrpSpPr/>
+        <p:nvPr/>
+      </p:nvGrpSpPr>
+      <p:grpSpPr>
+        <a:xfrm>
+          <a:off x="0" y="0"/>
+          <a:ext cx="0" cy="0"/>
+          <a:chOff x="0" y="0"/>
+          <a:chExt cx="0" cy="0"/>
+        </a:xfrm>
+      </p:grpSpPr>
+      <p:sp>
+        <p:nvSpPr>
+          <p:cNvPr id="2" name="Text 0"/>
+          <p:cNvSpPr/>
+          <p:nvPr/>
+        </p:nvSpPr>
+        <p:spPr>
+          <a:xfrm>
+            <a:off x="0" y="0"/>
+            <a:ext cx="9144000" cy="101501"/>
+          </a:xfrm>
+          <a:prstGeom prst="rect">
+            <a:avLst/>
+          </a:prstGeom>
+          <a:solidFill>
+            <a:srgbClr val="5D1D2E"/>
+          </a:solidFill>
+          <a:ln/>
+        </p:spPr>
+        <p:txBody>
+          <a:bodyPr wrap="square" rtlCol="0" anchor="ctr"/>
+          <a:lstStyle/>
+          <a:p>
+            <a:pPr indent="0" marL="0">
+              <a:buNone/>
+            </a:pPr>
+            <a:endParaRPr lang="en-US" dirty="0"/>
+          </a:p>
+        </p:txBody>
+      </p:sp>
+      <p:sp>
+        <p:nvSpPr>
+          <p:cNvPr id="3" name="Text 1"/>
+          <p:cNvSpPr/>
+          <p:nvPr/>
+        </p:nvSpPr>
+        <p:spPr>
+          <a:xfrm>
+            <a:off x="406301" y="457051"/>
+            <a:ext cx="8498026" cy="274290"/>
+          </a:xfrm>
+          <a:prstGeom prst="rect">
+            <a:avLst/>
+          </a:prstGeom>
+          <a:noFill/>
+          <a:ln/>
+        </p:spPr>
+        <p:txBody>
+          <a:bodyPr wrap="square" lIns="0" tIns="0" rIns="0" bIns="0" rtlCol="0" anchor="t"/>
+          <a:lstStyle/>
+          <a:p>
+            <a:pPr algn="l" indent="0" marL="0">
+              <a:lnSpc>
+                <a:spcPts val="2160"/>
+              </a:lnSpc>
+              <a:spcBef>
+                <a:spcPts val="600"/>
+              </a:spcBef>
+              <a:spcAft>
+                <a:spcPts val="800"/>
+              </a:spcAft>
+              <a:buNone/>
+            </a:pPr>
+            <a:r>
+              <a:rPr lang="en-US" sz="1800" b="1" dirty="0">
+                <a:solidFill>
+                  <a:srgbClr val="997929"/>
+                </a:solidFill>
+                <a:latin typeface="Times New Roman" pitchFamily="34" charset="0"/>
+                <a:ea typeface="Times New Roman" pitchFamily="34" charset="-122"/>
+                <a:cs typeface="Times New Roman" pitchFamily="34" charset="-120"/>
+              </a:rPr>
+              <a:t>Teacher notes</a:t>
+            </a:r>
+            <a:endParaRPr lang="en-US" sz="1800" dirty="0"/>
+          </a:p>
+        </p:txBody>
+      </p:sp>
+      <p:sp>
+        <p:nvSpPr>
+          <p:cNvPr id="4" name="Text 2"/>
+          <p:cNvSpPr/>
+          <p:nvPr/>
+        </p:nvSpPr>
+        <p:spPr>
+          <a:xfrm>
+            <a:off x="634901" y="883593"/>
+            <a:ext cx="8102798" cy="487561"/>
+          </a:xfrm>
+          <a:prstGeom prst="rect">
+            <a:avLst/>
+          </a:prstGeom>
+          <a:noFill/>
+          <a:ln/>
+        </p:spPr>
+        <p:txBody>
+          <a:bodyPr wrap="square" lIns="0" tIns="0" rIns="0" bIns="0" rtlCol="0" anchor="t"/>
+          <a:lstStyle/>
+          <a:p>
+            <a:pPr algn="l" marL="342900" indent="-342900">
+              <a:lnSpc>
+                <a:spcPts val="1620"/>
+              </a:lnSpc>
+              <a:spcAft>
+                <a:spcPts val="300"/>
+              </a:spcAft>
+              <a:buSzPct val="100000"/>
+              <a:buChar char="•"/>
+            </a:pPr>
+            <a:r>
+              <a:rPr lang="en-US" sz="1200" dirty="0">
+                <a:solidFill>
+                  <a:srgbClr val="1A1A1A"/>
+                </a:solidFill>
+                <a:latin typeface="Georgia" pitchFamily="34" charset="0"/>
+                <a:ea typeface="Georgia" pitchFamily="34" charset="-122"/>
+                <a:cs typeface="Georgia" pitchFamily="34" charset="-120"/>
+              </a:rPr>
+              <a:t>Some students will love the named-sūtra framing; some will find it pretentious. Both responses are fine. The math is what matters.</a:t>
+            </a:r>
+            <a:endParaRPr lang="en-US" sz="1200" dirty="0"/>
+          </a:p>
+        </p:txBody>
+      </p:sp>
+      <p:sp>
+        <p:nvSpPr>
+          <p:cNvPr id="5" name="Text 3"/>
+          <p:cNvSpPr/>
+          <p:nvPr/>
+        </p:nvSpPr>
+        <p:spPr>
+          <a:xfrm>
+            <a:off x="406301" y="4434929"/>
+            <a:ext cx="8498026" cy="213271"/>
+          </a:xfrm>
+          <a:prstGeom prst="rect">
+            <a:avLst/>
+          </a:prstGeom>
+          <a:noFill/>
+          <a:ln/>
+        </p:spPr>
+        <p:txBody>
+          <a:bodyPr wrap="square" lIns="0" tIns="0" rIns="0" bIns="0" rtlCol="0" anchor="t"/>
+          <a:lstStyle/>
+          <a:p>
+            <a:pPr algn="l" indent="0" marL="0">
+              <a:lnSpc>
+                <a:spcPts val="1680"/>
+              </a:lnSpc>
+              <a:spcBef>
+                <a:spcPts val="300"/>
+              </a:spcBef>
+              <a:spcAft>
+                <a:spcPts val="300"/>
+              </a:spcAft>
+              <a:buNone/>
+            </a:pPr>
+            <a:r>
+              <a:rPr lang="en-US" sz="1200" dirty="0">
+                <a:solidFill>
+                  <a:srgbClr val="1A1A1A"/>
+                </a:solidFill>
+                <a:latin typeface="Georgia" pitchFamily="34" charset="0"/>
+                <a:ea typeface="Georgia" pitchFamily="34" charset="-122"/>
+                <a:cs typeface="Georgia" pitchFamily="34" charset="-120"/>
+              </a:rPr>
+              <a:t>Senior ·  · IKS Curriculum</a:t>
+            </a:r>
+            <a:endParaRPr lang="en-US" sz="1200" dirty="0"/>
+          </a:p>
+        </p:txBody>
+      </p:sp>
+    </p:spTree>
+  </p:cSld>
+  <p:clrMapOvr>
+    <a:masterClrMapping/>
+  </p:clrMapOvr>
+</p:sld>
+</file>
+
+<file path=ppt/slides/slide13.xml><?xml version="1.0" encoding="utf-8"?>
+<p:sld xmlns:a="http://schemas.openxmlformats.org/drawingml/2006/main" xmlns:r="http://schemas.openxmlformats.org/officeDocument/2006/relationships" xmlns:p="http://schemas.openxmlformats.org/presentationml/2006/main">
+  <p:cSld name="Slide 13">
+    <p:bg>
+      <p:bgPr>
+        <a:solidFill>
+          <a:srgbClr val="FAF7F2"/>
+        </a:solidFill>
+      </p:bgPr>
+    </p:bg>
+    <p:spTree>
+      <p:nvGrpSpPr>
+        <p:cNvPr id="1" name=""/>
+        <p:cNvGrpSpPr/>
+        <p:nvPr/>
+      </p:nvGrpSpPr>
+      <p:grpSpPr>
+        <a:xfrm>
+          <a:off x="0" y="0"/>
+          <a:ext cx="0" cy="0"/>
+          <a:chOff x="0" y="0"/>
+          <a:chExt cx="0" cy="0"/>
+        </a:xfrm>
+      </p:grpSpPr>
+      <p:sp>
+        <p:nvSpPr>
+          <p:cNvPr id="2" name="Text 0"/>
+          <p:cNvSpPr/>
+          <p:nvPr/>
+        </p:nvSpPr>
+        <p:spPr>
+          <a:xfrm>
+            <a:off x="0" y="0"/>
+            <a:ext cx="9144000" cy="101501"/>
+          </a:xfrm>
+          <a:prstGeom prst="rect">
+            <a:avLst/>
+          </a:prstGeom>
+          <a:solidFill>
+            <a:srgbClr val="5D1D2E"/>
+          </a:solidFill>
+          <a:ln/>
+        </p:spPr>
+        <p:txBody>
+          <a:bodyPr wrap="square" rtlCol="0" anchor="ctr"/>
+          <a:lstStyle/>
+          <a:p>
+            <a:pPr indent="0" marL="0">
+              <a:buNone/>
+            </a:pPr>
+            <a:endParaRPr lang="en-US" dirty="0"/>
+          </a:p>
+        </p:txBody>
+      </p:sp>
+      <p:sp>
+        <p:nvSpPr>
+          <p:cNvPr id="3" name="Text 1"/>
+          <p:cNvSpPr/>
+          <p:nvPr/>
+        </p:nvSpPr>
+        <p:spPr>
+          <a:xfrm>
+            <a:off x="406301" y="457051"/>
+            <a:ext cx="8498026" cy="274290"/>
+          </a:xfrm>
+          <a:prstGeom prst="rect">
+            <a:avLst/>
+          </a:prstGeom>
+          <a:noFill/>
+          <a:ln/>
+        </p:spPr>
+        <p:txBody>
+          <a:bodyPr wrap="square" lIns="0" tIns="0" rIns="0" bIns="0" rtlCol="0" anchor="t"/>
+          <a:lstStyle/>
+          <a:p>
+            <a:pPr algn="l" indent="0" marL="0">
+              <a:lnSpc>
+                <a:spcPts val="2160"/>
+              </a:lnSpc>
+              <a:spcBef>
+                <a:spcPts val="600"/>
+              </a:spcBef>
+              <a:spcAft>
+                <a:spcPts val="800"/>
+              </a:spcAft>
+              <a:buNone/>
+            </a:pPr>
+            <a:r>
+              <a:rPr lang="en-US" sz="1800" b="1" dirty="0">
+                <a:solidFill>
+                  <a:srgbClr val="997929"/>
+                </a:solidFill>
+                <a:latin typeface="Times New Roman" pitchFamily="34" charset="0"/>
+                <a:ea typeface="Times New Roman" pitchFamily="34" charset="-122"/>
+                <a:cs typeface="Times New Roman" pitchFamily="34" charset="-120"/>
+              </a:rPr>
+              <a:t>Citation(s) used</a:t>
+            </a:r>
+            <a:endParaRPr lang="en-US" sz="1800" dirty="0"/>
+          </a:p>
+        </p:txBody>
+      </p:sp>
+      <p:sp>
+        <p:nvSpPr>
+          <p:cNvPr id="4" name="Text 2"/>
+          <p:cNvSpPr/>
+          <p:nvPr/>
+        </p:nvSpPr>
+        <p:spPr>
+          <a:xfrm>
+            <a:off x="634901" y="883593"/>
+            <a:ext cx="8102798" cy="525661"/>
+          </a:xfrm>
+          <a:prstGeom prst="rect">
+            <a:avLst/>
+          </a:prstGeom>
+          <a:noFill/>
+          <a:ln/>
+        </p:spPr>
+        <p:txBody>
+          <a:bodyPr wrap="square" lIns="0" tIns="0" rIns="0" bIns="0" rtlCol="0" anchor="t"/>
+          <a:lstStyle/>
+          <a:p>
+            <a:pPr algn="l" marL="342900" indent="-342900">
+              <a:lnSpc>
+                <a:spcPts val="1620"/>
+              </a:lnSpc>
+              <a:spcAft>
+                <a:spcPts val="300"/>
+              </a:spcAft>
+              <a:buSzPct val="100000"/>
+              <a:buChar char="•"/>
+            </a:pPr>
+            <a:r>
+              <a:rPr lang="en-US" sz="1200" i="1" dirty="0">
+                <a:solidFill>
+                  <a:srgbClr val="1A1A1A"/>
+                </a:solidFill>
+                <a:latin typeface="Georgia" pitchFamily="34" charset="0"/>
+                <a:ea typeface="Georgia" pitchFamily="34" charset="-122"/>
+                <a:cs typeface="Georgia" pitchFamily="34" charset="-120"/>
+              </a:rPr>
+              <a:t>Vedic Mathematics Batch1.pdf</a:t>
+            </a:r>
+            <a:pPr algn="l" indent="0" marL="0">
+              <a:lnSpc>
+                <a:spcPts val="1620"/>
+              </a:lnSpc>
+              <a:spcAft>
+                <a:spcPts val="300"/>
+              </a:spcAft>
+              <a:buNone/>
+            </a:pPr>
+            <a:r>
+              <a:rPr lang="en-US" sz="1200" dirty="0">
+                <a:solidFill>
+                  <a:srgbClr val="1A1A1A"/>
+                </a:solidFill>
+                <a:latin typeface="Georgia" pitchFamily="34" charset="0"/>
+                <a:ea typeface="Georgia" pitchFamily="34" charset="-122"/>
+                <a:cs typeface="Georgia" pitchFamily="34" charset="-120"/>
+              </a:rPr>
+              <a:t>, §5.5 (Sankalana applications).</a:t>
+            </a:r>
+            <a:endParaRPr lang="en-US" sz="1200" dirty="0"/>
+          </a:p>
+          <a:p>
+            <a:pPr algn="l" marL="342900" indent="-342900">
+              <a:lnSpc>
+                <a:spcPts val="1620"/>
+              </a:lnSpc>
+              <a:spcAft>
+                <a:spcPts val="300"/>
+              </a:spcAft>
+              <a:buSzPct val="100000"/>
+              <a:buChar char="•"/>
+            </a:pPr>
+            <a:r>
+              <a:rPr lang="en-US" sz="1200" dirty="0">
+                <a:solidFill>
+                  <a:srgbClr val="1A1A1A"/>
+                </a:solidFill>
+                <a:latin typeface="Georgia" pitchFamily="34" charset="0"/>
+                <a:ea typeface="Georgia" pitchFamily="34" charset="-122"/>
+                <a:cs typeface="Georgia" pitchFamily="34" charset="-120"/>
+              </a:rPr>
+              <a:t>Tirthaji (1965), Chapter on Pūraṇāpūraṇābhyām.</a:t>
+            </a:r>
+            <a:endParaRPr lang="en-US" sz="1200" dirty="0"/>
+          </a:p>
+        </p:txBody>
+      </p:sp>
+      <p:sp>
+        <p:nvSpPr>
+          <p:cNvPr id="5" name="Text 3"/>
           <p:cNvSpPr/>
           <p:nvPr/>
         </p:nvSpPr>
@@ -2480,7 +3311,7 @@
                 <a:ea typeface="Times New Roman" pitchFamily="34" charset="-122"/>
                 <a:cs typeface="Times New Roman" pitchFamily="34" charset="-120"/>
               </a:rPr>
-              <a:t>Materials</a:t>
+              <a:t>Learning objective</a:t>
             </a:r>
             <a:endParaRPr lang="en-US" sz="1800" dirty="0"/>
           </a:p>
@@ -2495,7 +3326,7 @@
         <p:spPr>
           <a:xfrm>
             <a:off x="406301" y="870942"/>
-            <a:ext cx="8498026" cy="213271"/>
+            <a:ext cx="8498026" cy="426541"/>
           </a:xfrm>
           <a:prstGeom prst="rect">
             <a:avLst/>
@@ -2528,7 +3359,99 @@
                 <a:ea typeface="Georgia" pitchFamily="34" charset="-122"/>
                 <a:cs typeface="Georgia" pitchFamily="34" charset="-120"/>
               </a:rPr>
-              <a:t>– Whiteboard – Drill sheet (mixed sūtra applications)</a:t>
+              <a:t>Students apply </a:t>
+            </a:r>
+            <a:pPr algn="l" indent="0" marL="0">
+              <a:lnSpc>
+                <a:spcPts val="1680"/>
+              </a:lnSpc>
+              <a:spcBef>
+                <a:spcPts val="300"/>
+              </a:spcBef>
+              <a:spcAft>
+                <a:spcPts val="300"/>
+              </a:spcAft>
+              <a:buNone/>
+            </a:pPr>
+            <a:r>
+              <a:rPr lang="en-US" sz="1200" i="1" dirty="0">
+                <a:solidFill>
+                  <a:srgbClr val="1A1A1A"/>
+                </a:solidFill>
+                <a:latin typeface="Georgia" pitchFamily="34" charset="0"/>
+                <a:ea typeface="Georgia" pitchFamily="34" charset="-122"/>
+                <a:cs typeface="Georgia" pitchFamily="34" charset="-120"/>
+              </a:rPr>
+              <a:t>Sankalana Vyavakalanābhyām</a:t>
+            </a:r>
+            <a:pPr algn="l" indent="0" marL="0">
+              <a:lnSpc>
+                <a:spcPts val="1680"/>
+              </a:lnSpc>
+              <a:spcBef>
+                <a:spcPts val="300"/>
+              </a:spcBef>
+              <a:spcAft>
+                <a:spcPts val="300"/>
+              </a:spcAft>
+              <a:buNone/>
+            </a:pPr>
+            <a:r>
+              <a:rPr lang="en-US" sz="1200" dirty="0">
+                <a:solidFill>
+                  <a:srgbClr val="1A1A1A"/>
+                </a:solidFill>
+                <a:latin typeface="Georgia" pitchFamily="34" charset="0"/>
+                <a:ea typeface="Georgia" pitchFamily="34" charset="-122"/>
+                <a:cs typeface="Georgia" pitchFamily="34" charset="-120"/>
+              </a:rPr>
+              <a:t> and </a:t>
+            </a:r>
+            <a:pPr algn="l" indent="0" marL="0">
+              <a:lnSpc>
+                <a:spcPts val="1680"/>
+              </a:lnSpc>
+              <a:spcBef>
+                <a:spcPts val="300"/>
+              </a:spcBef>
+              <a:spcAft>
+                <a:spcPts val="300"/>
+              </a:spcAft>
+              <a:buNone/>
+            </a:pPr>
+            <a:r>
+              <a:rPr lang="en-US" sz="1200" i="1" dirty="0">
+                <a:solidFill>
+                  <a:srgbClr val="1A1A1A"/>
+                </a:solidFill>
+                <a:latin typeface="Georgia" pitchFamily="34" charset="0"/>
+                <a:ea typeface="Georgia" pitchFamily="34" charset="-122"/>
+                <a:cs typeface="Georgia" pitchFamily="34" charset="-120"/>
+              </a:rPr>
+              <a:t>Pūraṇāpūraṇābhyāṁ</a:t>
+            </a:r>
+            <a:pPr algn="l" indent="0" marL="0">
+              <a:lnSpc>
+                <a:spcPts val="1680"/>
+              </a:lnSpc>
+              <a:spcBef>
+                <a:spcPts val="300"/>
+              </a:spcBef>
+              <a:spcAft>
+                <a:spcPts val="300"/>
+              </a:spcAft>
+              <a:buNone/>
+            </a:pPr>
+            <a:r>
+              <a:rPr lang="en-US" sz="1200" dirty="0">
+                <a:solidFill>
+                  <a:srgbClr val="1A1A1A"/>
+                </a:solidFill>
+                <a:latin typeface="Georgia" pitchFamily="34" charset="0"/>
+                <a:ea typeface="Georgia" pitchFamily="34" charset="-122"/>
+                <a:cs typeface="Georgia" pitchFamily="34" charset="-120"/>
+              </a:rPr>
+              <a:t> to a range of mental-arithmetic problems beyond simple addition.</a:t>
             </a:r>
             <a:endParaRPr lang="en-US" sz="1200" dirty="0"/>
           </a:p>
@@ -2686,7 +3609,7 @@
                 <a:ea typeface="Times New Roman" pitchFamily="34" charset="-122"/>
                 <a:cs typeface="Times New Roman" pitchFamily="34" charset="-120"/>
               </a:rPr>
-              <a:t>Flow</a:t>
+              <a:t>Materials</a:t>
             </a:r>
             <a:endParaRPr lang="en-US" sz="1800" dirty="0"/>
           </a:p>
@@ -2695,6 +3618,76 @@
       <p:sp>
         <p:nvSpPr>
           <p:cNvPr id="4" name="Text 2"/>
+          <p:cNvSpPr/>
+          <p:nvPr/>
+        </p:nvSpPr>
+        <p:spPr>
+          <a:xfrm>
+            <a:off x="634901" y="883593"/>
+            <a:ext cx="8102798" cy="525661"/>
+          </a:xfrm>
+          <a:prstGeom prst="rect">
+            <a:avLst/>
+          </a:prstGeom>
+          <a:noFill/>
+          <a:ln/>
+        </p:spPr>
+        <p:txBody>
+          <a:bodyPr wrap="square" lIns="0" tIns="0" rIns="0" bIns="0" rtlCol="0" anchor="t"/>
+          <a:lstStyle/>
+          <a:p>
+            <a:pPr algn="l" marL="342900" indent="-342900">
+              <a:lnSpc>
+                <a:spcPts val="1620"/>
+              </a:lnSpc>
+              <a:spcAft>
+                <a:spcPts val="300"/>
+              </a:spcAft>
+              <a:buSzPct val="100000"/>
+              <a:buChar char="•"/>
+            </a:pPr>
+            <a:r>
+              <a:rPr lang="en-US" sz="1200" dirty="0">
+                <a:solidFill>
+                  <a:srgbClr val="1A1A1A"/>
+                </a:solidFill>
+                <a:latin typeface="Georgia" pitchFamily="34" charset="0"/>
+                <a:ea typeface="Georgia" pitchFamily="34" charset="-122"/>
+                <a:cs typeface="Georgia" pitchFamily="34" charset="-120"/>
+              </a:rPr>
+              <a:t>Whiteboard</a:t>
+            </a:r>
+            <a:endParaRPr lang="en-US" sz="1200" dirty="0"/>
+          </a:p>
+          <a:p>
+            <a:pPr algn="l" marL="342900" indent="-342900">
+              <a:lnSpc>
+                <a:spcPts val="1620"/>
+              </a:lnSpc>
+              <a:spcAft>
+                <a:spcPts val="300"/>
+              </a:spcAft>
+              <a:buSzPct val="100000"/>
+              <a:buChar char="•"/>
+            </a:pPr>
+            <a:r>
+              <a:rPr lang="en-US" sz="1200" dirty="0">
+                <a:solidFill>
+                  <a:srgbClr val="1A1A1A"/>
+                </a:solidFill>
+                <a:latin typeface="Georgia" pitchFamily="34" charset="0"/>
+                <a:ea typeface="Georgia" pitchFamily="34" charset="-122"/>
+                <a:cs typeface="Georgia" pitchFamily="34" charset="-120"/>
+              </a:rPr>
+              <a:t>Drill sheet (mixed sūtra applications)</a:t>
+            </a:r>
+            <a:endParaRPr lang="en-US" sz="1200" dirty="0"/>
+          </a:p>
+        </p:txBody>
+      </p:sp>
+      <p:sp>
+        <p:nvSpPr>
+          <p:cNvPr id="5" name="Text 3"/>
           <p:cNvSpPr/>
           <p:nvPr/>
         </p:nvSpPr>
@@ -2844,7 +3837,7 @@
                 <a:ea typeface="Times New Roman" pitchFamily="34" charset="-122"/>
                 <a:cs typeface="Times New Roman" pitchFamily="34" charset="-120"/>
               </a:rPr>
-              <a:t>Warm-up (5 min)</a:t>
+              <a:t>Flow</a:t>
             </a:r>
             <a:endParaRPr lang="en-US" sz="1800" dirty="0"/>
           </a:p>
@@ -2853,54 +3846,6 @@
       <p:sp>
         <p:nvSpPr>
           <p:cNvPr id="4" name="Text 2"/>
-          <p:cNvSpPr/>
-          <p:nvPr/>
-        </p:nvSpPr>
-        <p:spPr>
-          <a:xfrm>
-            <a:off x="406301" y="870942"/>
-            <a:ext cx="8498026" cy="213271"/>
-          </a:xfrm>
-          <a:prstGeom prst="rect">
-            <a:avLst/>
-          </a:prstGeom>
-          <a:noFill/>
-          <a:ln/>
-        </p:spPr>
-        <p:txBody>
-          <a:bodyPr wrap="square" lIns="0" tIns="0" rIns="0" bIns="0" rtlCol="0" anchor="t"/>
-          <a:lstStyle/>
-          <a:p>
-            <a:pPr algn="l" indent="0" marL="0">
-              <a:lnSpc>
-                <a:spcPts val="1680"/>
-              </a:lnSpc>
-              <a:spcBef>
-                <a:spcPts val="300"/>
-              </a:spcBef>
-              <a:spcAft>
-                <a:spcPts val="300"/>
-              </a:spcAft>
-              <a:buNone/>
-            </a:pPr>
-            <a:r>
-              <a:rPr lang="en-US" sz="1200" dirty="0">
-                <a:solidFill>
-                  <a:srgbClr val="1A1A1A"/>
-                </a:solidFill>
-                <a:latin typeface="Georgia" pitchFamily="34" charset="0"/>
-                <a:ea typeface="Georgia" pitchFamily="34" charset="-122"/>
-                <a:cs typeface="Georgia" pitchFamily="34" charset="-120"/>
-              </a:rPr>
-              <a:t>– Quick recall of sūtras 7 and 8.</a:t>
-            </a:r>
-            <a:endParaRPr lang="en-US" sz="1200" dirty="0"/>
-          </a:p>
-        </p:txBody>
-      </p:sp>
-      <p:sp>
-        <p:nvSpPr>
-          <p:cNvPr id="5" name="Text 3"/>
           <p:cNvSpPr/>
           <p:nvPr/>
         </p:nvSpPr>
@@ -3050,7 +3995,7 @@
                 <a:ea typeface="Times New Roman" pitchFamily="34" charset="-122"/>
                 <a:cs typeface="Times New Roman" pitchFamily="34" charset="-120"/>
               </a:rPr>
-              <a:t>Core (25 min) — Sūtra in action</a:t>
+              <a:t>Warm-up (5 min)</a:t>
             </a:r>
             <a:endParaRPr lang="en-US" sz="1800" dirty="0"/>
           </a:p>
@@ -3088,26 +4033,6 @@
               <a:buChar char="•"/>
             </a:pPr>
             <a:r>
-              <a:rPr lang="en-US" sz="1200" b="1" dirty="0">
-                <a:solidFill>
-                  <a:srgbClr val="1A1A1A"/>
-                </a:solidFill>
-                <a:latin typeface="Georgia" pitchFamily="34" charset="0"/>
-                <a:ea typeface="Georgia" pitchFamily="34" charset="-122"/>
-                <a:cs typeface="Georgia" pitchFamily="34" charset="-120"/>
-              </a:rPr>
-              <a:t>Sankalana Vyavakalanābhyām</a:t>
-            </a:r>
-            <a:pPr algn="l" indent="0" marL="0">
-              <a:lnSpc>
-                <a:spcPts val="1620"/>
-              </a:lnSpc>
-              <a:spcAft>
-                <a:spcPts val="300"/>
-              </a:spcAft>
-              <a:buNone/>
-            </a:pPr>
-            <a:r>
               <a:rPr lang="en-US" sz="1200" dirty="0">
                 <a:solidFill>
                   <a:srgbClr val="1A1A1A"/>
@@ -3116,7 +4041,7 @@
                 <a:ea typeface="Georgia" pitchFamily="34" charset="-122"/>
                 <a:cs typeface="Georgia" pitchFamily="34" charset="-120"/>
               </a:rPr>
-              <a:t> — "by addition and by subtraction."</a:t>
+              <a:t>Quick recall of sūtras 7 and 8.</a:t>
             </a:r>
             <a:endParaRPr lang="en-US" sz="1200" dirty="0"/>
           </a:p>
@@ -3125,374 +4050,6 @@
       <p:sp>
         <p:nvSpPr>
           <p:cNvPr id="5" name="Text 3"/>
-          <p:cNvSpPr/>
-          <p:nvPr/>
-        </p:nvSpPr>
-        <p:spPr>
-          <a:xfrm>
-            <a:off x="406301" y="1254323"/>
-            <a:ext cx="8498026" cy="436066"/>
-          </a:xfrm>
-          <a:prstGeom prst="rect">
-            <a:avLst/>
-          </a:prstGeom>
-          <a:noFill/>
-          <a:ln/>
-        </p:spPr>
-        <p:txBody>
-          <a:bodyPr wrap="square" lIns="0" tIns="0" rIns="0" bIns="0" rtlCol="0" anchor="t"/>
-          <a:lstStyle/>
-          <a:p>
-            <a:pPr algn="l" indent="0" marL="0">
-              <a:lnSpc>
-                <a:spcPts val="1680"/>
-              </a:lnSpc>
-              <a:spcBef>
-                <a:spcPts val="300"/>
-              </a:spcBef>
-              <a:spcAft>
-                <a:spcPts val="300"/>
-              </a:spcAft>
-              <a:buNone/>
-            </a:pPr>
-            <a:r>
-              <a:rPr lang="en-US" sz="1200" dirty="0">
-                <a:solidFill>
-                  <a:srgbClr val="1A1A1A"/>
-                </a:solidFill>
-                <a:latin typeface="Georgia" pitchFamily="34" charset="0"/>
-                <a:ea typeface="Georgia" pitchFamily="34" charset="-122"/>
-                <a:cs typeface="Georgia" pitchFamily="34" charset="-120"/>
-              </a:rPr>
-              <a:t>– Addition: 33 + 9 = 33 + 10 − 1 = 42 – Subtraction: 53 − 9 = 53 − 10 + 1 = 44 – Larger: 234 + 98 = 234 + 100 − 2 = 332 – Generalisation: when one operand is near a base, replace it with </a:t>
-            </a:r>
-            <a:pPr algn="l" indent="0" marL="0">
-              <a:lnSpc>
-                <a:spcPts val="1680"/>
-              </a:lnSpc>
-              <a:spcBef>
-                <a:spcPts val="300"/>
-              </a:spcBef>
-              <a:spcAft>
-                <a:spcPts val="300"/>
-              </a:spcAft>
-              <a:buNone/>
-            </a:pPr>
-            <a:r>
-              <a:rPr lang="en-US" sz="1200" dirty="0">
-                <a:solidFill>
-                  <a:srgbClr val="1A1A1A"/>
-                </a:solidFill>
-                <a:latin typeface="Georgia" pitchFamily="34" charset="0"/>
-                <a:ea typeface="Georgia" pitchFamily="34" charset="-122"/>
-                <a:cs typeface="Georgia" pitchFamily="34" charset="-120"/>
-              </a:rPr>
-              <a:t>base ± deficiency</a:t>
-            </a:r>
-            <a:pPr algn="l" indent="0" marL="0">
-              <a:lnSpc>
-                <a:spcPts val="1680"/>
-              </a:lnSpc>
-              <a:spcBef>
-                <a:spcPts val="300"/>
-              </a:spcBef>
-              <a:spcAft>
-                <a:spcPts val="300"/>
-              </a:spcAft>
-              <a:buNone/>
-            </a:pPr>
-            <a:r>
-              <a:rPr lang="en-US" sz="1200" dirty="0">
-                <a:solidFill>
-                  <a:srgbClr val="1A1A1A"/>
-                </a:solidFill>
-                <a:latin typeface="Georgia" pitchFamily="34" charset="0"/>
-                <a:ea typeface="Georgia" pitchFamily="34" charset="-122"/>
-                <a:cs typeface="Georgia" pitchFamily="34" charset="-120"/>
-              </a:rPr>
-              <a:t> and apply.</a:t>
-            </a:r>
-            <a:endParaRPr lang="en-US" sz="1200" dirty="0"/>
-          </a:p>
-        </p:txBody>
-      </p:sp>
-      <p:sp>
-        <p:nvSpPr>
-          <p:cNvPr id="6" name="Text 4"/>
-          <p:cNvSpPr/>
-          <p:nvPr/>
-        </p:nvSpPr>
-        <p:spPr>
-          <a:xfrm>
-            <a:off x="634901" y="1779240"/>
-            <a:ext cx="8102798" cy="281880"/>
-          </a:xfrm>
-          <a:prstGeom prst="rect">
-            <a:avLst/>
-          </a:prstGeom>
-          <a:noFill/>
-          <a:ln/>
-        </p:spPr>
-        <p:txBody>
-          <a:bodyPr wrap="square" lIns="0" tIns="0" rIns="0" bIns="0" rtlCol="0" anchor="t"/>
-          <a:lstStyle/>
-          <a:p>
-            <a:pPr algn="l" marL="342900" indent="-342900">
-              <a:lnSpc>
-                <a:spcPts val="1620"/>
-              </a:lnSpc>
-              <a:spcAft>
-                <a:spcPts val="300"/>
-              </a:spcAft>
-              <a:buSzPct val="100000"/>
-              <a:buChar char="•"/>
-            </a:pPr>
-            <a:r>
-              <a:rPr lang="en-US" sz="1200" b="1" dirty="0">
-                <a:solidFill>
-                  <a:srgbClr val="1A1A1A"/>
-                </a:solidFill>
-                <a:latin typeface="Georgia" pitchFamily="34" charset="0"/>
-                <a:ea typeface="Georgia" pitchFamily="34" charset="-122"/>
-                <a:cs typeface="Georgia" pitchFamily="34" charset="-120"/>
-              </a:rPr>
-              <a:t>Pūraṇāpūraṇābhyāṁ</a:t>
-            </a:r>
-            <a:pPr algn="l" indent="0" marL="0">
-              <a:lnSpc>
-                <a:spcPts val="1620"/>
-              </a:lnSpc>
-              <a:spcAft>
-                <a:spcPts val="300"/>
-              </a:spcAft>
-              <a:buNone/>
-            </a:pPr>
-            <a:r>
-              <a:rPr lang="en-US" sz="1200" dirty="0">
-                <a:solidFill>
-                  <a:srgbClr val="1A1A1A"/>
-                </a:solidFill>
-                <a:latin typeface="Georgia" pitchFamily="34" charset="0"/>
-                <a:ea typeface="Georgia" pitchFamily="34" charset="-122"/>
-                <a:cs typeface="Georgia" pitchFamily="34" charset="-120"/>
-              </a:rPr>
-              <a:t> — "by completing or non-completing."</a:t>
-            </a:r>
-            <a:endParaRPr lang="en-US" sz="1200" dirty="0"/>
-          </a:p>
-        </p:txBody>
-      </p:sp>
-      <p:sp>
-        <p:nvSpPr>
-          <p:cNvPr id="7" name="Text 5"/>
-          <p:cNvSpPr/>
-          <p:nvPr/>
-        </p:nvSpPr>
-        <p:spPr>
-          <a:xfrm>
-            <a:off x="406301" y="2149971"/>
-            <a:ext cx="8498026" cy="426541"/>
-          </a:xfrm>
-          <a:prstGeom prst="rect">
-            <a:avLst/>
-          </a:prstGeom>
-          <a:noFill/>
-          <a:ln/>
-        </p:spPr>
-        <p:txBody>
-          <a:bodyPr wrap="square" lIns="0" tIns="0" rIns="0" bIns="0" rtlCol="0" anchor="t"/>
-          <a:lstStyle/>
-          <a:p>
-            <a:pPr algn="l" indent="0" marL="0">
-              <a:lnSpc>
-                <a:spcPts val="1680"/>
-              </a:lnSpc>
-              <a:spcBef>
-                <a:spcPts val="300"/>
-              </a:spcBef>
-              <a:spcAft>
-                <a:spcPts val="300"/>
-              </a:spcAft>
-              <a:buNone/>
-            </a:pPr>
-            <a:r>
-              <a:rPr lang="en-US" sz="1200" dirty="0">
-                <a:solidFill>
-                  <a:srgbClr val="1A1A1A"/>
-                </a:solidFill>
-                <a:latin typeface="Georgia" pitchFamily="34" charset="0"/>
-                <a:ea typeface="Georgia" pitchFamily="34" charset="-122"/>
-                <a:cs typeface="Georgia" pitchFamily="34" charset="-120"/>
-              </a:rPr>
-              <a:t>– Completion: 47 + 53 = 100 (complete to 100, no carry mess).    – Non-completion as a technique: when partial sums equal a base, you "complete" them mentally.</a:t>
-            </a:r>
-            <a:endParaRPr lang="en-US" sz="1200" dirty="0"/>
-          </a:p>
-        </p:txBody>
-      </p:sp>
-      <p:sp>
-        <p:nvSpPr>
-          <p:cNvPr id="8" name="Text 6"/>
-          <p:cNvSpPr/>
-          <p:nvPr/>
-        </p:nvSpPr>
-        <p:spPr>
-          <a:xfrm>
-            <a:off x="634901" y="2665363"/>
-            <a:ext cx="8102798" cy="487561"/>
-          </a:xfrm>
-          <a:prstGeom prst="rect">
-            <a:avLst/>
-          </a:prstGeom>
-          <a:noFill/>
-          <a:ln/>
-        </p:spPr>
-        <p:txBody>
-          <a:bodyPr wrap="square" lIns="0" tIns="0" rIns="0" bIns="0" rtlCol="0" anchor="t"/>
-          <a:lstStyle/>
-          <a:p>
-            <a:pPr algn="l" marL="342900" indent="-342900">
-              <a:lnSpc>
-                <a:spcPts val="1620"/>
-              </a:lnSpc>
-              <a:spcAft>
-                <a:spcPts val="300"/>
-              </a:spcAft>
-              <a:buSzPct val="100000"/>
-              <a:buChar char="•"/>
-            </a:pPr>
-            <a:r>
-              <a:rPr lang="en-US" sz="1200" b="1" dirty="0">
-                <a:solidFill>
-                  <a:srgbClr val="1A1A1A"/>
-                </a:solidFill>
-                <a:latin typeface="Georgia" pitchFamily="34" charset="0"/>
-                <a:ea typeface="Georgia" pitchFamily="34" charset="-122"/>
-                <a:cs typeface="Georgia" pitchFamily="34" charset="-120"/>
-              </a:rPr>
-              <a:t>Application to the dot method.</a:t>
-            </a:r>
-            <a:pPr algn="l" indent="0" marL="0">
-              <a:lnSpc>
-                <a:spcPts val="1620"/>
-              </a:lnSpc>
-              <a:spcAft>
-                <a:spcPts val="300"/>
-              </a:spcAft>
-              <a:buNone/>
-            </a:pPr>
-            <a:r>
-              <a:rPr lang="en-US" sz="1200" dirty="0">
-                <a:solidFill>
-                  <a:srgbClr val="1A1A1A"/>
-                </a:solidFill>
-                <a:latin typeface="Georgia" pitchFamily="34" charset="0"/>
-                <a:ea typeface="Georgia" pitchFamily="34" charset="-122"/>
-                <a:cs typeface="Georgia" pitchFamily="34" charset="-120"/>
-              </a:rPr>
-              <a:t> The dot itself IS a Pūraṇāpūraṇābhyāṁ application — every dot = "I completed to 10." Connect this to the dot method procedure explicitly.</a:t>
-            </a:r>
-            <a:endParaRPr lang="en-US" sz="1200" dirty="0"/>
-          </a:p>
-        </p:txBody>
-      </p:sp>
-      <p:sp>
-        <p:nvSpPr>
-          <p:cNvPr id="9" name="Text 7"/>
-          <p:cNvSpPr/>
-          <p:nvPr/>
-        </p:nvSpPr>
-        <p:spPr>
-          <a:xfrm>
-            <a:off x="634901" y="3254425"/>
-            <a:ext cx="8102798" cy="281880"/>
-          </a:xfrm>
-          <a:prstGeom prst="rect">
-            <a:avLst/>
-          </a:prstGeom>
-          <a:noFill/>
-          <a:ln/>
-        </p:spPr>
-        <p:txBody>
-          <a:bodyPr wrap="square" lIns="0" tIns="0" rIns="0" bIns="0" rtlCol="0" anchor="t"/>
-          <a:lstStyle/>
-          <a:p>
-            <a:pPr algn="l" marL="342900" indent="-342900">
-              <a:lnSpc>
-                <a:spcPts val="1620"/>
-              </a:lnSpc>
-              <a:spcAft>
-                <a:spcPts val="300"/>
-              </a:spcAft>
-              <a:buSzPct val="100000"/>
-              <a:buChar char="•"/>
-            </a:pPr>
-            <a:r>
-              <a:rPr lang="en-US" sz="1200" b="1" dirty="0">
-                <a:solidFill>
-                  <a:srgbClr val="1A1A1A"/>
-                </a:solidFill>
-                <a:latin typeface="Georgia" pitchFamily="34" charset="0"/>
-                <a:ea typeface="Georgia" pitchFamily="34" charset="-122"/>
-                <a:cs typeface="Georgia" pitchFamily="34" charset="-120"/>
-              </a:rPr>
-              <a:t>A 4-question drill (10 min):</a:t>
-            </a:r>
-            <a:endParaRPr lang="en-US" sz="1200" dirty="0"/>
-          </a:p>
-        </p:txBody>
-      </p:sp>
-      <p:sp>
-        <p:nvSpPr>
-          <p:cNvPr id="10" name="Text 8"/>
-          <p:cNvSpPr/>
-          <p:nvPr/>
-        </p:nvSpPr>
-        <p:spPr>
-          <a:xfrm>
-            <a:off x="406301" y="3625155"/>
-            <a:ext cx="8498026" cy="639812"/>
-          </a:xfrm>
-          <a:prstGeom prst="rect">
-            <a:avLst/>
-          </a:prstGeom>
-          <a:noFill/>
-          <a:ln/>
-        </p:spPr>
-        <p:txBody>
-          <a:bodyPr wrap="square" lIns="0" tIns="0" rIns="0" bIns="0" rtlCol="0" anchor="t"/>
-          <a:lstStyle/>
-          <a:p>
-            <a:pPr algn="l" indent="0" marL="0">
-              <a:lnSpc>
-                <a:spcPts val="1680"/>
-              </a:lnSpc>
-              <a:spcBef>
-                <a:spcPts val="300"/>
-              </a:spcBef>
-              <a:spcAft>
-                <a:spcPts val="300"/>
-              </a:spcAft>
-              <a:buNone/>
-            </a:pPr>
-            <a:r>
-              <a:rPr lang="en-US" sz="1200" dirty="0">
-                <a:solidFill>
-                  <a:srgbClr val="1A1A1A"/>
-                </a:solidFill>
-                <a:latin typeface="Georgia" pitchFamily="34" charset="0"/>
-                <a:ea typeface="Georgia" pitchFamily="34" charset="-122"/>
-                <a:cs typeface="Georgia" pitchFamily="34" charset="-120"/>
-              </a:rPr>
-              <a:t>– 67 + 38 = ?  (use Sankalana)    – 234 − 99 = ?  (use Sankalana)    – Compute 4+6+7+3+8+2 by Pūraṇāpūraṇābhyāṁ (find completions first).    – 99 × 4 = ?  (apply Ekanyūnena Pūrveṇa — "one less than the previous"; 99 = 100 − 1, so 99×4 = 400−4 = 396)</a:t>
-            </a:r>
-            <a:endParaRPr lang="en-US" sz="1200" dirty="0"/>
-          </a:p>
-        </p:txBody>
-      </p:sp>
-      <p:sp>
-        <p:nvSpPr>
-          <p:cNvPr id="11" name="Text 9"/>
           <p:cNvSpPr/>
           <p:nvPr/>
         </p:nvSpPr>
@@ -3642,7 +4199,7 @@
                 <a:ea typeface="Times New Roman" pitchFamily="34" charset="-122"/>
                 <a:cs typeface="Times New Roman" pitchFamily="34" charset="-120"/>
               </a:rPr>
-              <a:t>Formative Part A (10 min)</a:t>
+              <a:t>Core (25 min) — Sūtra in action</a:t>
             </a:r>
             <a:endParaRPr lang="en-US" sz="1800" dirty="0"/>
           </a:p>
@@ -3657,7 +4214,7 @@
         <p:spPr>
           <a:xfrm>
             <a:off x="634901" y="883593"/>
-            <a:ext cx="8102798" cy="300930"/>
+            <a:ext cx="8102798" cy="281880"/>
           </a:xfrm>
           <a:prstGeom prst="rect">
             <a:avLst/>
@@ -3680,6 +4237,26 @@
               <a:buChar char="•"/>
             </a:pPr>
             <a:r>
+              <a:rPr lang="en-US" sz="1200" b="1" dirty="0">
+                <a:solidFill>
+                  <a:srgbClr val="1A1A1A"/>
+                </a:solidFill>
+                <a:latin typeface="Georgia" pitchFamily="34" charset="0"/>
+                <a:ea typeface="Georgia" pitchFamily="34" charset="-122"/>
+                <a:cs typeface="Georgia" pitchFamily="34" charset="-120"/>
+              </a:rPr>
+              <a:t>Sankalana Vyavakalanābhyām</a:t>
+            </a:r>
+            <a:pPr algn="l" indent="0" marL="0">
+              <a:lnSpc>
+                <a:spcPts val="1620"/>
+              </a:lnSpc>
+              <a:spcAft>
+                <a:spcPts val="300"/>
+              </a:spcAft>
+              <a:buNone/>
+            </a:pPr>
+            <a:r>
               <a:rPr lang="en-US" sz="1200" dirty="0">
                 <a:solidFill>
                   <a:srgbClr val="1A1A1A"/>
@@ -3688,7 +4265,125 @@
                 <a:ea typeface="Georgia" pitchFamily="34" charset="-122"/>
                 <a:cs typeface="Georgia" pitchFamily="34" charset="-120"/>
               </a:rPr>
-              <a:t>quizzes/formative.md</a:t>
+              <a:t> — "by addition and by subtraction."</a:t>
+            </a:r>
+            <a:endParaRPr lang="en-US" sz="1200" dirty="0"/>
+          </a:p>
+        </p:txBody>
+      </p:sp>
+      <p:sp>
+        <p:nvSpPr>
+          <p:cNvPr id="5" name="Text 3"/>
+          <p:cNvSpPr/>
+          <p:nvPr/>
+        </p:nvSpPr>
+        <p:spPr>
+          <a:xfrm>
+            <a:off x="634901" y="1266974"/>
+            <a:ext cx="8102798" cy="1032272"/>
+          </a:xfrm>
+          <a:prstGeom prst="rect">
+            <a:avLst/>
+          </a:prstGeom>
+          <a:noFill/>
+          <a:ln/>
+        </p:spPr>
+        <p:txBody>
+          <a:bodyPr wrap="square" lIns="0" tIns="0" rIns="0" bIns="0" rtlCol="0" anchor="t"/>
+          <a:lstStyle/>
+          <a:p>
+            <a:pPr algn="l" marL="342900" indent="-342900">
+              <a:lnSpc>
+                <a:spcPts val="1620"/>
+              </a:lnSpc>
+              <a:spcAft>
+                <a:spcPts val="300"/>
+              </a:spcAft>
+              <a:buSzPct val="100000"/>
+              <a:buChar char="•"/>
+            </a:pPr>
+            <a:r>
+              <a:rPr lang="en-US" sz="1200" dirty="0">
+                <a:solidFill>
+                  <a:srgbClr val="1A1A1A"/>
+                </a:solidFill>
+                <a:latin typeface="Georgia" pitchFamily="34" charset="0"/>
+                <a:ea typeface="Georgia" pitchFamily="34" charset="-122"/>
+                <a:cs typeface="Georgia" pitchFamily="34" charset="-120"/>
+              </a:rPr>
+              <a:t>Addition: 33 + 9 = 33 + 10 − 1 = 42</a:t>
+            </a:r>
+            <a:endParaRPr lang="en-US" sz="1200" dirty="0"/>
+          </a:p>
+          <a:p>
+            <a:pPr algn="l" marL="342900" indent="-342900">
+              <a:lnSpc>
+                <a:spcPts val="1620"/>
+              </a:lnSpc>
+              <a:spcAft>
+                <a:spcPts val="300"/>
+              </a:spcAft>
+              <a:buSzPct val="100000"/>
+              <a:buChar char="•"/>
+            </a:pPr>
+            <a:r>
+              <a:rPr lang="en-US" sz="1200" dirty="0">
+                <a:solidFill>
+                  <a:srgbClr val="1A1A1A"/>
+                </a:solidFill>
+                <a:latin typeface="Georgia" pitchFamily="34" charset="0"/>
+                <a:ea typeface="Georgia" pitchFamily="34" charset="-122"/>
+                <a:cs typeface="Georgia" pitchFamily="34" charset="-120"/>
+              </a:rPr>
+              <a:t>Subtraction: 53 − 9 = 53 − 10 + 1 = 44</a:t>
+            </a:r>
+            <a:endParaRPr lang="en-US" sz="1200" dirty="0"/>
+          </a:p>
+          <a:p>
+            <a:pPr algn="l" marL="342900" indent="-342900">
+              <a:lnSpc>
+                <a:spcPts val="1620"/>
+              </a:lnSpc>
+              <a:spcAft>
+                <a:spcPts val="300"/>
+              </a:spcAft>
+              <a:buSzPct val="100000"/>
+              <a:buChar char="•"/>
+            </a:pPr>
+            <a:r>
+              <a:rPr lang="en-US" sz="1200" dirty="0">
+                <a:solidFill>
+                  <a:srgbClr val="1A1A1A"/>
+                </a:solidFill>
+                <a:latin typeface="Georgia" pitchFamily="34" charset="0"/>
+                <a:ea typeface="Georgia" pitchFamily="34" charset="-122"/>
+                <a:cs typeface="Georgia" pitchFamily="34" charset="-120"/>
+              </a:rPr>
+              <a:t>Larger: 234 + 98 = 234 + 100 − 2 = 332</a:t>
+            </a:r>
+            <a:endParaRPr lang="en-US" sz="1200" dirty="0"/>
+          </a:p>
+          <a:p>
+            <a:pPr algn="l" marL="342900" indent="-342900">
+              <a:lnSpc>
+                <a:spcPts val="1620"/>
+              </a:lnSpc>
+              <a:spcAft>
+                <a:spcPts val="300"/>
+              </a:spcAft>
+              <a:buSzPct val="100000"/>
+              <a:buChar char="•"/>
+            </a:pPr>
+            <a:r>
+              <a:rPr lang="en-US" sz="1200" dirty="0">
+                <a:solidFill>
+                  <a:srgbClr val="1A1A1A"/>
+                </a:solidFill>
+                <a:latin typeface="Georgia" pitchFamily="34" charset="0"/>
+                <a:ea typeface="Georgia" pitchFamily="34" charset="-122"/>
+                <a:cs typeface="Georgia" pitchFamily="34" charset="-120"/>
+              </a:rPr>
+              <a:t>Generalisation: when one operand is near a base, replace it with </a:t>
             </a:r>
             <a:pPr algn="l" indent="0" marL="0">
               <a:lnSpc>
@@ -3708,7 +4403,27 @@
                 <a:ea typeface="Georgia" pitchFamily="34" charset="-122"/>
                 <a:cs typeface="Georgia" pitchFamily="34" charset="-120"/>
               </a:rPr>
-              <a:t> Part A: 5 sūtra-application questions.</a:t>
+              <a:t>base ± deficiency</a:t>
+            </a:r>
+            <a:pPr algn="l" indent="0" marL="0">
+              <a:lnSpc>
+                <a:spcPts val="1620"/>
+              </a:lnSpc>
+              <a:spcAft>
+                <a:spcPts val="300"/>
+              </a:spcAft>
+              <a:buNone/>
+            </a:pPr>
+            <a:r>
+              <a:rPr lang="en-US" sz="1200" dirty="0">
+                <a:solidFill>
+                  <a:srgbClr val="1A1A1A"/>
+                </a:solidFill>
+                <a:latin typeface="Georgia" pitchFamily="34" charset="0"/>
+                <a:ea typeface="Georgia" pitchFamily="34" charset="-122"/>
+                <a:cs typeface="Georgia" pitchFamily="34" charset="-120"/>
+              </a:rPr>
+              <a:t> and apply.</a:t>
             </a:r>
             <a:endParaRPr lang="en-US" sz="1200" dirty="0"/>
           </a:p>
@@ -3716,7 +4431,7 @@
       </p:sp>
       <p:sp>
         <p:nvSpPr>
-          <p:cNvPr id="5" name="Text 3"/>
+          <p:cNvPr id="6" name="Text 4"/>
           <p:cNvSpPr/>
           <p:nvPr/>
         </p:nvSpPr>
@@ -3866,7 +4581,7 @@
                 <a:ea typeface="Times New Roman" pitchFamily="34" charset="-122"/>
                 <a:cs typeface="Times New Roman" pitchFamily="34" charset="-120"/>
               </a:rPr>
-              <a:t>Wrap-up (5 min)</a:t>
+              <a:t>Core (25 min) — Sūtra in action (cont.)</a:t>
             </a:r>
             <a:endParaRPr lang="en-US" sz="1800" dirty="0"/>
           </a:p>
@@ -3880,8 +4595,8 @@
         </p:nvSpPr>
         <p:spPr>
           <a:xfrm>
-            <a:off x="406301" y="870942"/>
-            <a:ext cx="8498026" cy="213271"/>
+            <a:off x="634901" y="883593"/>
+            <a:ext cx="8102798" cy="281880"/>
           </a:xfrm>
           <a:prstGeom prst="rect">
             <a:avLst/>
@@ -3893,13 +4608,31 @@
           <a:bodyPr wrap="square" lIns="0" tIns="0" rIns="0" bIns="0" rtlCol="0" anchor="t"/>
           <a:lstStyle/>
           <a:p>
+            <a:pPr algn="l" marL="342900" indent="-342900">
+              <a:lnSpc>
+                <a:spcPts val="1620"/>
+              </a:lnSpc>
+              <a:spcAft>
+                <a:spcPts val="300"/>
+              </a:spcAft>
+              <a:buSzPct val="100000"/>
+              <a:buChar char="•"/>
+            </a:pPr>
+            <a:r>
+              <a:rPr lang="en-US" sz="1200" b="1" dirty="0">
+                <a:solidFill>
+                  <a:srgbClr val="1A1A1A"/>
+                </a:solidFill>
+                <a:latin typeface="Georgia" pitchFamily="34" charset="0"/>
+                <a:ea typeface="Georgia" pitchFamily="34" charset="-122"/>
+                <a:cs typeface="Georgia" pitchFamily="34" charset="-120"/>
+              </a:rPr>
+              <a:t>Pūraṇāpūraṇābhyāṁ</a:t>
+            </a:r>
             <a:pPr algn="l" indent="0" marL="0">
               <a:lnSpc>
-                <a:spcPts val="1680"/>
-              </a:lnSpc>
-              <a:spcBef>
-                <a:spcPts val="300"/>
-              </a:spcBef>
+                <a:spcPts val="1620"/>
+              </a:lnSpc>
               <a:spcAft>
                 <a:spcPts val="300"/>
               </a:spcAft>
@@ -3914,30 +4647,143 @@
                 <a:ea typeface="Georgia" pitchFamily="34" charset="-122"/>
                 <a:cs typeface="Georgia" pitchFamily="34" charset="-120"/>
               </a:rPr>
-              <a:t>– Preview Day 5: </a:t>
+              <a:t> — "by completing or non-completing."</a:t>
+            </a:r>
+            <a:endParaRPr lang="en-US" sz="1200" dirty="0"/>
+          </a:p>
+        </p:txBody>
+      </p:sp>
+      <p:sp>
+        <p:nvSpPr>
+          <p:cNvPr id="5" name="Text 3"/>
+          <p:cNvSpPr/>
+          <p:nvPr/>
+        </p:nvSpPr>
+        <p:spPr>
+          <a:xfrm>
+            <a:off x="634901" y="1266974"/>
+            <a:ext cx="8102798" cy="525661"/>
+          </a:xfrm>
+          <a:prstGeom prst="rect">
+            <a:avLst/>
+          </a:prstGeom>
+          <a:noFill/>
+          <a:ln/>
+        </p:spPr>
+        <p:txBody>
+          <a:bodyPr wrap="square" lIns="0" tIns="0" rIns="0" bIns="0" rtlCol="0" anchor="t"/>
+          <a:lstStyle/>
+          <a:p>
+            <a:pPr algn="l" marL="342900" indent="-342900">
+              <a:lnSpc>
+                <a:spcPts val="1620"/>
+              </a:lnSpc>
+              <a:spcAft>
+                <a:spcPts val="300"/>
+              </a:spcAft>
+              <a:buSzPct val="100000"/>
+              <a:buChar char="•"/>
+            </a:pPr>
+            <a:r>
+              <a:rPr lang="en-US" sz="1200" dirty="0">
+                <a:solidFill>
+                  <a:srgbClr val="1A1A1A"/>
+                </a:solidFill>
+                <a:latin typeface="Georgia" pitchFamily="34" charset="0"/>
+                <a:ea typeface="Georgia" pitchFamily="34" charset="-122"/>
+                <a:cs typeface="Georgia" pitchFamily="34" charset="-120"/>
+              </a:rPr>
+              <a:t>Completion: 47 + 53 = 100 (complete to 100, no carry mess).</a:t>
+            </a:r>
+            <a:endParaRPr lang="en-US" sz="1200" dirty="0"/>
+          </a:p>
+          <a:p>
+            <a:pPr algn="l" marL="342900" indent="-342900">
+              <a:lnSpc>
+                <a:spcPts val="1620"/>
+              </a:lnSpc>
+              <a:spcAft>
+                <a:spcPts val="300"/>
+              </a:spcAft>
+              <a:buSzPct val="100000"/>
+              <a:buChar char="•"/>
+            </a:pPr>
+            <a:r>
+              <a:rPr lang="en-US" sz="1200" dirty="0">
+                <a:solidFill>
+                  <a:srgbClr val="1A1A1A"/>
+                </a:solidFill>
+                <a:latin typeface="Georgia" pitchFamily="34" charset="0"/>
+                <a:ea typeface="Georgia" pitchFamily="34" charset="-122"/>
+                <a:cs typeface="Georgia" pitchFamily="34" charset="-120"/>
+              </a:rPr>
+              <a:t>Non-completion as a technique: when partial sums equal a base, you "complete" them mentally.</a:t>
+            </a:r>
+            <a:endParaRPr lang="en-US" sz="1200" dirty="0"/>
+          </a:p>
+        </p:txBody>
+      </p:sp>
+      <p:sp>
+        <p:nvSpPr>
+          <p:cNvPr id="6" name="Text 4"/>
+          <p:cNvSpPr/>
+          <p:nvPr/>
+        </p:nvSpPr>
+        <p:spPr>
+          <a:xfrm>
+            <a:off x="634901" y="1894136"/>
+            <a:ext cx="8102798" cy="487561"/>
+          </a:xfrm>
+          <a:prstGeom prst="rect">
+            <a:avLst/>
+          </a:prstGeom>
+          <a:noFill/>
+          <a:ln/>
+        </p:spPr>
+        <p:txBody>
+          <a:bodyPr wrap="square" lIns="0" tIns="0" rIns="0" bIns="0" rtlCol="0" anchor="t"/>
+          <a:lstStyle/>
+          <a:p>
+            <a:pPr algn="l" marL="342900" indent="-342900">
+              <a:lnSpc>
+                <a:spcPts val="1620"/>
+              </a:lnSpc>
+              <a:spcAft>
+                <a:spcPts val="300"/>
+              </a:spcAft>
+              <a:buSzPct val="100000"/>
+              <a:buChar char="•"/>
+            </a:pPr>
+            <a:r>
+              <a:rPr lang="en-US" sz="1200" b="1" dirty="0">
+                <a:solidFill>
+                  <a:srgbClr val="1A1A1A"/>
+                </a:solidFill>
+                <a:latin typeface="Georgia" pitchFamily="34" charset="0"/>
+                <a:ea typeface="Georgia" pitchFamily="34" charset="-122"/>
+                <a:cs typeface="Georgia" pitchFamily="34" charset="-120"/>
+              </a:rPr>
+              <a:t>Application to the dot method.</a:t>
             </a:r>
             <a:pPr algn="l" indent="0" marL="0">
               <a:lnSpc>
-                <a:spcPts val="1680"/>
-              </a:lnSpc>
-              <a:spcBef>
-                <a:spcPts val="300"/>
-              </a:spcBef>
-              <a:spcAft>
-                <a:spcPts val="300"/>
-              </a:spcAft>
-              <a:buNone/>
-            </a:pPr>
-            <a:r>
-              <a:rPr lang="en-US" sz="1200" i="1" dirty="0">
-                <a:solidFill>
-                  <a:srgbClr val="1A1A1A"/>
-                </a:solidFill>
-                <a:latin typeface="Georgia" pitchFamily="34" charset="0"/>
-                <a:ea typeface="Georgia" pitchFamily="34" charset="-122"/>
-                <a:cs typeface="Georgia" pitchFamily="34" charset="-120"/>
-              </a:rPr>
-              <a:t>"Tomorrow — does the dot method work in other bases? Let's find out."</a:t>
+                <a:spcPts val="1620"/>
+              </a:lnSpc>
+              <a:spcAft>
+                <a:spcPts val="300"/>
+              </a:spcAft>
+              <a:buNone/>
+            </a:pPr>
+            <a:r>
+              <a:rPr lang="en-US" sz="1200" dirty="0">
+                <a:solidFill>
+                  <a:srgbClr val="1A1A1A"/>
+                </a:solidFill>
+                <a:latin typeface="Georgia" pitchFamily="34" charset="0"/>
+                <a:ea typeface="Georgia" pitchFamily="34" charset="-122"/>
+                <a:cs typeface="Georgia" pitchFamily="34" charset="-120"/>
+              </a:rPr>
+              <a:t> The dot itself IS a Pūraṇāpūraṇābhyāṁ application — every dot = "I completed to 10." Connect this to the dot method procedure explicitly.</a:t>
             </a:r>
             <a:endParaRPr lang="en-US" sz="1200" dirty="0"/>
           </a:p>
@@ -3945,7 +4791,7 @@
       </p:sp>
       <p:sp>
         <p:nvSpPr>
-          <p:cNvPr id="5" name="Text 3"/>
+          <p:cNvPr id="7" name="Text 5"/>
           <p:cNvSpPr/>
           <p:nvPr/>
         </p:nvSpPr>
@@ -4095,7 +4941,7 @@
                 <a:ea typeface="Times New Roman" pitchFamily="34" charset="-122"/>
                 <a:cs typeface="Times New Roman" pitchFamily="34" charset="-120"/>
               </a:rPr>
-              <a:t>Differentiation</a:t>
+              <a:t>Core (25 min) — Sūtra in action (cont.)</a:t>
             </a:r>
             <a:endParaRPr lang="en-US" sz="1800" dirty="0"/>
           </a:p>
@@ -4110,7 +4956,7 @@
         <p:spPr>
           <a:xfrm>
             <a:off x="634901" y="883593"/>
-            <a:ext cx="8102798" cy="769441"/>
+            <a:ext cx="8102798" cy="281880"/>
           </a:xfrm>
           <a:prstGeom prst="rect">
             <a:avLst/>
@@ -4141,110 +4987,32 @@
                 <a:ea typeface="Georgia" pitchFamily="34" charset="-122"/>
                 <a:cs typeface="Georgia" pitchFamily="34" charset="-120"/>
               </a:rPr>
-              <a:t>Tier up:</a:t>
-            </a:r>
-            <a:pPr algn="l" indent="0" marL="0">
-              <a:lnSpc>
-                <a:spcPts val="1620"/>
-              </a:lnSpc>
-              <a:spcAft>
-                <a:spcPts val="300"/>
-              </a:spcAft>
-              <a:buNone/>
-            </a:pPr>
-            <a:r>
-              <a:rPr lang="en-US" sz="1200" dirty="0">
-                <a:solidFill>
-                  <a:srgbClr val="1A1A1A"/>
-                </a:solidFill>
-                <a:latin typeface="Georgia" pitchFamily="34" charset="0"/>
-                <a:ea typeface="Georgia" pitchFamily="34" charset="-122"/>
-                <a:cs typeface="Georgia" pitchFamily="34" charset="-120"/>
-              </a:rPr>
-              <a:t> Pick </a:t>
-            </a:r>
-            <a:pPr algn="l" indent="0" marL="0">
-              <a:lnSpc>
-                <a:spcPts val="1620"/>
-              </a:lnSpc>
-              <a:spcAft>
-                <a:spcPts val="300"/>
-              </a:spcAft>
-              <a:buNone/>
-            </a:pPr>
-            <a:r>
-              <a:rPr lang="en-US" sz="1200" i="1" dirty="0">
-                <a:solidFill>
-                  <a:srgbClr val="1A1A1A"/>
-                </a:solidFill>
-                <a:latin typeface="Georgia" pitchFamily="34" charset="0"/>
-                <a:ea typeface="Georgia" pitchFamily="34" charset="-122"/>
-                <a:cs typeface="Georgia" pitchFamily="34" charset="-120"/>
-              </a:rPr>
-              <a:t>Ūrdhva-Tiryagbhyām</a:t>
-            </a:r>
-            <a:pPr algn="l" indent="0" marL="0">
-              <a:lnSpc>
-                <a:spcPts val="1620"/>
-              </a:lnSpc>
-              <a:spcAft>
-                <a:spcPts val="300"/>
-              </a:spcAft>
-              <a:buNone/>
-            </a:pPr>
-            <a:r>
-              <a:rPr lang="en-US" sz="1200" dirty="0">
-                <a:solidFill>
-                  <a:srgbClr val="1A1A1A"/>
-                </a:solidFill>
-                <a:latin typeface="Georgia" pitchFamily="34" charset="0"/>
-                <a:ea typeface="Georgia" pitchFamily="34" charset="-122"/>
-                <a:cs typeface="Georgia" pitchFamily="34" charset="-120"/>
-              </a:rPr>
-              <a:t> (vertically-and-crosswise multiplication). Self-teach from </a:t>
-            </a:r>
-            <a:pPr algn="l" indent="0" marL="0">
-              <a:lnSpc>
-                <a:spcPts val="1620"/>
-              </a:lnSpc>
-              <a:spcAft>
-                <a:spcPts val="300"/>
-              </a:spcAft>
-              <a:buNone/>
-            </a:pPr>
-            <a:r>
-              <a:rPr lang="en-US" sz="1200" dirty="0">
-                <a:solidFill>
-                  <a:srgbClr val="1A1A1A"/>
-                </a:solidFill>
-                <a:latin typeface="Georgia" pitchFamily="34" charset="0"/>
-                <a:ea typeface="Georgia" pitchFamily="34" charset="-122"/>
-                <a:cs typeface="Georgia" pitchFamily="34" charset="-120"/>
-              </a:rPr>
-              <a:t>Vedic Mathematics.pdf</a:t>
-            </a:r>
-            <a:pPr algn="l" indent="0" marL="0">
-              <a:lnSpc>
-                <a:spcPts val="1620"/>
-              </a:lnSpc>
-              <a:spcAft>
-                <a:spcPts val="300"/>
-              </a:spcAft>
-              <a:buNone/>
-            </a:pPr>
-            <a:r>
-              <a:rPr lang="en-US" sz="1200" dirty="0">
-                <a:solidFill>
-                  <a:srgbClr val="1A1A1A"/>
-                </a:solidFill>
-                <a:latin typeface="Georgia" pitchFamily="34" charset="0"/>
-                <a:ea typeface="Georgia" pitchFamily="34" charset="-122"/>
-                <a:cs typeface="Georgia" pitchFamily="34" charset="-120"/>
-              </a:rPr>
-              <a:t> §3.</a:t>
+              <a:t>A 4-question drill (10 min):</a:t>
             </a:r>
             <a:endParaRPr lang="en-US" sz="1200" dirty="0"/>
           </a:p>
+        </p:txBody>
+      </p:sp>
+      <p:sp>
+        <p:nvSpPr>
+          <p:cNvPr id="5" name="Text 3"/>
+          <p:cNvSpPr/>
+          <p:nvPr/>
+        </p:nvSpPr>
+        <p:spPr>
+          <a:xfrm>
+            <a:off x="634901" y="1266974"/>
+            <a:ext cx="8102798" cy="1013222"/>
+          </a:xfrm>
+          <a:prstGeom prst="rect">
+            <a:avLst/>
+          </a:prstGeom>
+          <a:noFill/>
+          <a:ln/>
+        </p:spPr>
+        <p:txBody>
+          <a:bodyPr wrap="square" lIns="0" tIns="0" rIns="0" bIns="0" rtlCol="0" anchor="t"/>
+          <a:lstStyle/>
           <a:p>
             <a:pPr algn="l" marL="342900" indent="-342900">
               <a:lnSpc>
@@ -4257,24 +5025,28 @@
               <a:buChar char="•"/>
             </a:pPr>
             <a:r>
-              <a:rPr lang="en-US" sz="1200" b="1" dirty="0">
-                <a:solidFill>
-                  <a:srgbClr val="1A1A1A"/>
-                </a:solidFill>
-                <a:latin typeface="Georgia" pitchFamily="34" charset="0"/>
-                <a:ea typeface="Georgia" pitchFamily="34" charset="-122"/>
-                <a:cs typeface="Georgia" pitchFamily="34" charset="-120"/>
-              </a:rPr>
-              <a:t>Tier down:</a:t>
-            </a:r>
-            <a:pPr algn="l" indent="0" marL="0">
+              <a:rPr lang="en-US" sz="1200" dirty="0">
+                <a:solidFill>
+                  <a:srgbClr val="1A1A1A"/>
+                </a:solidFill>
+                <a:latin typeface="Georgia" pitchFamily="34" charset="0"/>
+                <a:ea typeface="Georgia" pitchFamily="34" charset="-122"/>
+                <a:cs typeface="Georgia" pitchFamily="34" charset="-120"/>
+              </a:rPr>
+              <a:t>67 + 38 = ? (use Sankalana)</a:t>
+            </a:r>
+            <a:endParaRPr lang="en-US" sz="1200" dirty="0"/>
+          </a:p>
+          <a:p>
+            <a:pPr algn="l" marL="342900" indent="-342900">
               <a:lnSpc>
                 <a:spcPts val="1620"/>
               </a:lnSpc>
               <a:spcAft>
                 <a:spcPts val="300"/>
               </a:spcAft>
-              <a:buNone/>
+              <a:buSzPct val="100000"/>
+              <a:buChar char="•"/>
             </a:pPr>
             <a:r>
               <a:rPr lang="en-US" sz="1200" dirty="0">
@@ -4285,15 +5057,63 @@
                 <a:ea typeface="Georgia" pitchFamily="34" charset="-122"/>
                 <a:cs typeface="Georgia" pitchFamily="34" charset="-120"/>
               </a:rPr>
-              <a:t> Focus on Sankalana additions only.</a:t>
+              <a:t>234 − 99 = ? (use Sankalana)</a:t>
             </a:r>
             <a:endParaRPr lang="en-US" sz="1200" dirty="0"/>
           </a:p>
-        </p:txBody>
-      </p:sp>
-      <p:sp>
-        <p:nvSpPr>
-          <p:cNvPr id="5" name="Text 3"/>
+          <a:p>
+            <a:pPr algn="l" marL="342900" indent="-342900">
+              <a:lnSpc>
+                <a:spcPts val="1620"/>
+              </a:lnSpc>
+              <a:spcAft>
+                <a:spcPts val="300"/>
+              </a:spcAft>
+              <a:buSzPct val="100000"/>
+              <a:buChar char="•"/>
+            </a:pPr>
+            <a:r>
+              <a:rPr lang="en-US" sz="1200" dirty="0">
+                <a:solidFill>
+                  <a:srgbClr val="1A1A1A"/>
+                </a:solidFill>
+                <a:latin typeface="Georgia" pitchFamily="34" charset="0"/>
+                <a:ea typeface="Georgia" pitchFamily="34" charset="-122"/>
+                <a:cs typeface="Georgia" pitchFamily="34" charset="-120"/>
+              </a:rPr>
+              <a:t>Compute 4+6+7+3+8+2 by Pūraṇāpūraṇābhyāṁ (find completions first).</a:t>
+            </a:r>
+            <a:endParaRPr lang="en-US" sz="1200" dirty="0"/>
+          </a:p>
+          <a:p>
+            <a:pPr algn="l" marL="342900" indent="-342900">
+              <a:lnSpc>
+                <a:spcPts val="1620"/>
+              </a:lnSpc>
+              <a:spcAft>
+                <a:spcPts val="300"/>
+              </a:spcAft>
+              <a:buSzPct val="100000"/>
+              <a:buChar char="•"/>
+            </a:pPr>
+            <a:r>
+              <a:rPr lang="en-US" sz="1200" dirty="0">
+                <a:solidFill>
+                  <a:srgbClr val="1A1A1A"/>
+                </a:solidFill>
+                <a:latin typeface="Georgia" pitchFamily="34" charset="0"/>
+                <a:ea typeface="Georgia" pitchFamily="34" charset="-122"/>
+                <a:cs typeface="Georgia" pitchFamily="34" charset="-120"/>
+              </a:rPr>
+              <a:t>99 × 4 = ? (apply Ekanyūnena Pūrveṇa — "one less than the previous"; 99 = 100 − 1, so 99×4 = 400−4 = 396)</a:t>
+            </a:r>
+            <a:endParaRPr lang="en-US" sz="1200" dirty="0"/>
+          </a:p>
+        </p:txBody>
+      </p:sp>
+      <p:sp>
+        <p:nvSpPr>
+          <p:cNvPr id="6" name="Text 4"/>
           <p:cNvSpPr/>
           <p:nvPr/>
         </p:nvSpPr>
@@ -4443,7 +5263,7 @@
                 <a:ea typeface="Times New Roman" pitchFamily="34" charset="-122"/>
                 <a:cs typeface="Times New Roman" pitchFamily="34" charset="-120"/>
               </a:rPr>
-              <a:t>Teacher notes</a:t>
+              <a:t>Formative Part A (10 min)</a:t>
             </a:r>
             <a:endParaRPr lang="en-US" sz="1800" dirty="0"/>
           </a:p>
@@ -4457,8 +5277,8 @@
         </p:nvSpPr>
         <p:spPr>
           <a:xfrm>
-            <a:off x="406301" y="870942"/>
-            <a:ext cx="8498026" cy="426541"/>
+            <a:off x="634901" y="883593"/>
+            <a:ext cx="8102798" cy="300930"/>
           </a:xfrm>
           <a:prstGeom prst="rect">
             <a:avLst/>
@@ -4470,13 +5290,31 @@
           <a:bodyPr wrap="square" lIns="0" tIns="0" rIns="0" bIns="0" rtlCol="0" anchor="t"/>
           <a:lstStyle/>
           <a:p>
+            <a:pPr algn="l" marL="342900" indent="-342900">
+              <a:lnSpc>
+                <a:spcPts val="1620"/>
+              </a:lnSpc>
+              <a:spcAft>
+                <a:spcPts val="300"/>
+              </a:spcAft>
+              <a:buSzPct val="100000"/>
+              <a:buChar char="•"/>
+            </a:pPr>
+            <a:r>
+              <a:rPr lang="en-US" sz="1200" dirty="0">
+                <a:solidFill>
+                  <a:srgbClr val="1A1A1A"/>
+                </a:solidFill>
+                <a:latin typeface="Georgia" pitchFamily="34" charset="0"/>
+                <a:ea typeface="Georgia" pitchFamily="34" charset="-122"/>
+                <a:cs typeface="Georgia" pitchFamily="34" charset="-120"/>
+              </a:rPr>
+              <a:t>quizzes/formative.md</a:t>
+            </a:r>
             <a:pPr algn="l" indent="0" marL="0">
               <a:lnSpc>
-                <a:spcPts val="1680"/>
-              </a:lnSpc>
-              <a:spcBef>
-                <a:spcPts val="300"/>
-              </a:spcBef>
+                <a:spcPts val="1620"/>
+              </a:lnSpc>
               <a:spcAft>
                 <a:spcPts val="300"/>
               </a:spcAft>
@@ -4491,7 +5329,7 @@
                 <a:ea typeface="Georgia" pitchFamily="34" charset="-122"/>
                 <a:cs typeface="Georgia" pitchFamily="34" charset="-120"/>
               </a:rPr>
-              <a:t>– Some students will love the named-sūtra framing; some will find it pretentious. Both responses are fine. The math is what matters.</a:t>
+              <a:t> Part A: 5 sūtra-application questions.</a:t>
             </a:r>
             <a:endParaRPr lang="en-US" sz="1200" dirty="0"/>
           </a:p>
